--- a/python-course-ppt/逐节课件/Python讲授课件-单元14.pptx
+++ b/python-course-ppt/逐节课件/Python讲授课件-单元14.pptx
@@ -327,6 +327,80 @@
           </a:p>
         </p:txBody>
       </p:sp>
+      <p:sp>
+        <p:nvSpPr>
+          <p:cNvPr id="2" name="讲课提示"/>
+          <p:cNvSpPr txBox="1"/>
+          <p:nvPr/>
+        </p:nvSpPr>
+        <p:spPr>
+          <a:xfrm>
+            <a:off x="457200" y="457200"/>
+            <a:ext cx="6858000" cy="4800600"/>
+          </a:xfrm>
+          <a:prstGeom prst="rect">
+            <a:avLst/>
+          </a:prstGeom>
+        </p:spPr>
+        <p:txBody>
+          <a:bodyPr wrap="square"/>
+          <a:lstStyle/>
+          <a:p>
+            <a:r>
+              <a:rPr lang="zh-CN" dirty="0"/>
+              <a:t>单元 14 · 单元 14 · Play 按钮与记分</a:t>
+            </a:r>
+          </a:p>
+          <a:p>
+            <a:r>
+              <a:rPr lang="zh-CN" dirty="0"/>
+              <a:t/>
+            </a:r>
+          </a:p>
+          <a:p>
+            <a:r>
+              <a:rPr lang="zh-CN" dirty="0"/>
+              <a:t>本单元包含以下课节：</a:t>
+            </a:r>
+          </a:p>
+          <a:p>
+            <a:r>
+              <a:rPr lang="zh-CN" dirty="0"/>
+              <a:t>· 第 75 节 游戏状态机与 Button 类</a:t>
+            </a:r>
+          </a:p>
+          <a:p>
+            <a:r>
+              <a:rPr lang="zh-CN" dirty="0"/>
+              <a:t>· 第 76 节 记分牌与数据格式化</a:t>
+            </a:r>
+          </a:p>
+          <a:p>
+            <a:r>
+              <a:rPr lang="zh-CN" dirty="0"/>
+              <a:t>· 第 77 节 动态难度与余下飞船数</a:t>
+            </a:r>
+          </a:p>
+          <a:p>
+            <a:r>
+              <a:rPr lang="zh-CN" dirty="0"/>
+              <a:t>· 第 78 节 实战、答案与自查</a:t>
+            </a:r>
+          </a:p>
+          <a:p>
+            <a:r>
+              <a:rPr lang="zh-CN" dirty="0"/>
+              <a:t/>
+            </a:r>
+          </a:p>
+          <a:p>
+            <a:r>
+              <a:rPr lang="zh-CN" dirty="0"/>
+              <a:t>开场用 3 分钟讲清：这个单元学完能做出什么，最后会被关卡怎么验。</a:t>
+            </a:r>
+          </a:p>
+        </p:txBody>
+      </p:sp>
     </p:spTree>
   </p:cSld>
   <p:clrMapOvr>
@@ -396,6 +470,50 @@
           </a:p>
         </p:txBody>
       </p:sp>
+      <p:sp>
+        <p:nvSpPr>
+          <p:cNvPr id="2" name="讲课提示"/>
+          <p:cNvSpPr txBox="1"/>
+          <p:nvPr/>
+        </p:nvSpPr>
+        <p:spPr>
+          <a:xfrm>
+            <a:off x="457200" y="457200"/>
+            <a:ext cx="6858000" cy="4800600"/>
+          </a:xfrm>
+          <a:prstGeom prst="rect">
+            <a:avLst/>
+          </a:prstGeom>
+        </p:spPr>
+        <p:txBody>
+          <a:bodyPr wrap="square"/>
+          <a:lstStyle/>
+          <a:p>
+            <a:r>
+              <a:rPr lang="zh-CN" dirty="0"/>
+              <a:t>单元 14 小结 · 单元 14 · 小结</a:t>
+            </a:r>
+          </a:p>
+          <a:p>
+            <a:r>
+              <a:rPr lang="zh-CN" dirty="0"/>
+              <a:t/>
+            </a:r>
+          </a:p>
+          <a:p>
+            <a:r>
+              <a:rPr lang="zh-CN" dirty="0"/>
+              <a:t>收尾动作：让学生合上讲义，口述本单元三个最重要的结论；说不出来的，回对应课节。</a:t>
+            </a:r>
+          </a:p>
+          <a:p>
+            <a:r>
+              <a:rPr lang="zh-CN" dirty="0"/>
+              <a:t>然后当场勾一遍本单元课节的「已完成」，没打勾的进下一单元前补掉。</a:t>
+            </a:r>
+          </a:p>
+        </p:txBody>
+      </p:sp>
     </p:spTree>
   </p:cSld>
   <p:clrMapOvr>
@@ -525,6 +643,110 @@
           </a:p>
         </p:txBody>
       </p:sp>
+      <p:sp>
+        <p:nvSpPr>
+          <p:cNvPr id="2" name="讲课提示"/>
+          <p:cNvSpPr txBox="1"/>
+          <p:nvPr/>
+        </p:nvSpPr>
+        <p:spPr>
+          <a:xfrm>
+            <a:off x="457200" y="457200"/>
+            <a:ext cx="6858000" cy="4800600"/>
+          </a:xfrm>
+          <a:prstGeom prst="rect">
+            <a:avLst/>
+          </a:prstGeom>
+        </p:spPr>
+        <p:txBody>
+          <a:bodyPr wrap="square"/>
+          <a:lstStyle/>
+          <a:p>
+            <a:r>
+              <a:rPr lang="zh-CN" dirty="0"/>
+              <a:t>第 75 节 · 游戏状态机与 Button 类</a:t>
+            </a:r>
+          </a:p>
+          <a:p>
+            <a:r>
+              <a:rPr lang="zh-CN" dirty="0"/>
+              <a:t>单元 14 · Play 按钮与记分 · W16–W17</a:t>
+            </a:r>
+          </a:p>
+          <a:p>
+            <a:r>
+              <a:rPr lang="zh-CN" dirty="0"/>
+              <a:t/>
+            </a:r>
+          </a:p>
+          <a:p>
+            <a:r>
+              <a:rPr lang="zh-CN" dirty="0"/>
+              <a:t>学习目标：把游戏做成 inactive / active / game over 三态；理解 font.render 才能显示文字</a:t>
+            </a:r>
+          </a:p>
+          <a:p>
+            <a:r>
+              <a:rPr lang="zh-CN" dirty="0"/>
+              <a:t/>
+            </a:r>
+          </a:p>
+          <a:p>
+            <a:r>
+              <a:rPr lang="zh-CN" dirty="0"/>
+              <a:t>课堂实操（40 分钟，不看答案）：</a:t>
+            </a:r>
+          </a:p>
+          <a:p>
+            <a:r>
+              <a:rPr lang="zh-CN" dirty="0"/>
+              <a:t>· 现场写 Button 类并让它响应点击</a:t>
+            </a:r>
+          </a:p>
+          <a:p>
+            <a:r>
+              <a:rPr lang="zh-CN" dirty="0"/>
+              <a:t>· 把 stats.game_active 注释掉，看游戏怎么变</a:t>
+            </a:r>
+          </a:p>
+          <a:p>
+            <a:r>
+              <a:rPr lang="zh-CN" dirty="0"/>
+              <a:t>· 故意点 Play 两次，看会重置几次</a:t>
+            </a:r>
+          </a:p>
+          <a:p>
+            <a:r>
+              <a:rPr lang="zh-CN" dirty="0"/>
+              <a:t/>
+            </a:r>
+          </a:p>
+          <a:p>
+            <a:r>
+              <a:rPr lang="zh-CN" dirty="0"/>
+              <a:t>课后作业：</a:t>
+            </a:r>
+          </a:p>
+          <a:p>
+            <a:r>
+              <a:rPr lang="zh-CN" dirty="0"/>
+              <a:t>· 完成教材 14.1 全部动手练</a:t>
+            </a:r>
+          </a:p>
+          <a:p>
+            <a:r>
+              <a:rPr lang="zh-CN" dirty="0"/>
+              <a:t/>
+            </a:r>
+          </a:p>
+          <a:p>
+            <a:r>
+              <a:rPr lang="zh-CN" dirty="0"/>
+              <a:t>节奏：讲 20 分钟 → 学员自己敲 40 分钟（不看答案）→ 对讲评自查 20 分钟 → 写作业 10 分钟。</a:t>
+            </a:r>
+          </a:p>
+        </p:txBody>
+      </p:sp>
     </p:spTree>
   </p:cSld>
   <p:clrMapOvr>
@@ -618,6 +840,74 @@
           </a:p>
         </p:txBody>
       </p:sp>
+      <p:sp>
+        <p:nvSpPr>
+          <p:cNvPr id="2" name="讲课提示"/>
+          <p:cNvSpPr txBox="1"/>
+          <p:nvPr/>
+        </p:nvSpPr>
+        <p:spPr>
+          <a:xfrm>
+            <a:off x="457200" y="457200"/>
+            <a:ext cx="6858000" cy="4800600"/>
+          </a:xfrm>
+          <a:prstGeom prst="rect">
+            <a:avLst/>
+          </a:prstGeom>
+        </p:spPr>
+        <p:txBody>
+          <a:bodyPr wrap="square"/>
+          <a:lstStyle/>
+          <a:p>
+            <a:r>
+              <a:rPr lang="zh-CN" dirty="0"/>
+              <a:t>第 75 节 · 核心知识点：游戏状态机与 Button 类</a:t>
+            </a:r>
+          </a:p>
+          <a:p>
+            <a:r>
+              <a:rPr lang="zh-CN" dirty="0"/>
+              <a:t/>
+            </a:r>
+          </a:p>
+          <a:p>
+            <a:r>
+              <a:rPr lang="zh-CN" dirty="0"/>
+              <a:t>讲这一页时：先让学生说出上节课的结论，再逐块讲要点。</a:t>
+            </a:r>
+          </a:p>
+          <a:p>
+            <a:r>
+              <a:rPr lang="zh-CN" dirty="0"/>
+              <a:t>每讲完一块，问一句「这一步如果写错了，报错会长什么样？」——把错误提前讲。</a:t>
+            </a:r>
+          </a:p>
+          <a:p>
+            <a:r>
+              <a:rPr lang="zh-CN" dirty="0"/>
+              <a:t/>
+            </a:r>
+          </a:p>
+          <a:p>
+            <a:r>
+              <a:rPr lang="zh-CN" dirty="0"/>
+              <a:t>本节目标：把游戏做成 inactive / active / game over 三态；理解 font.render 才能显示文字</a:t>
+            </a:r>
+          </a:p>
+          <a:p>
+            <a:r>
+              <a:rPr lang="zh-CN" dirty="0"/>
+              <a:t/>
+            </a:r>
+          </a:p>
+          <a:p>
+            <a:r>
+              <a:rPr lang="zh-CN" dirty="0"/>
+              <a:t>看不到懂的地方，回讲义对应小节读一遍，再回来对着这页复述一次——能讲出来才算真懂。</a:t>
+            </a:r>
+          </a:p>
+        </p:txBody>
+      </p:sp>
     </p:spTree>
   </p:cSld>
   <p:clrMapOvr>
@@ -741,6 +1031,104 @@
           </a:p>
         </p:txBody>
       </p:sp>
+      <p:sp>
+        <p:nvSpPr>
+          <p:cNvPr id="2" name="讲课提示"/>
+          <p:cNvSpPr txBox="1"/>
+          <p:nvPr/>
+        </p:nvSpPr>
+        <p:spPr>
+          <a:xfrm>
+            <a:off x="457200" y="457200"/>
+            <a:ext cx="6858000" cy="4800600"/>
+          </a:xfrm>
+          <a:prstGeom prst="rect">
+            <a:avLst/>
+          </a:prstGeom>
+        </p:spPr>
+        <p:txBody>
+          <a:bodyPr wrap="square"/>
+          <a:lstStyle/>
+          <a:p>
+            <a:r>
+              <a:rPr lang="zh-CN" dirty="0"/>
+              <a:t>第 76 节 · 记分牌与数据格式化</a:t>
+            </a:r>
+          </a:p>
+          <a:p>
+            <a:r>
+              <a:rPr lang="zh-CN" dirty="0"/>
+              <a:t>单元 14 · Play 按钮与记分 · W17</a:t>
+            </a:r>
+          </a:p>
+          <a:p>
+            <a:r>
+              <a:rPr lang="zh-CN" dirty="0"/>
+              <a:t/>
+            </a:r>
+          </a:p>
+          <a:p>
+            <a:r>
+              <a:rPr lang="zh-CN" dirty="0"/>
+              <a:t>学习目标：用 prep_* 方法把数据渲染成图像；掌握 round 和千分位格式化</a:t>
+            </a:r>
+          </a:p>
+          <a:p>
+            <a:r>
+              <a:rPr lang="zh-CN" dirty="0"/>
+              <a:t/>
+            </a:r>
+          </a:p>
+          <a:p>
+            <a:r>
+              <a:rPr lang="zh-CN" dirty="0"/>
+              <a:t>课堂实操（40 分钟，不看答案）：</a:t>
+            </a:r>
+          </a:p>
+          <a:p>
+            <a:r>
+              <a:rPr lang="zh-CN" dirty="0"/>
+              <a:t>· 实现 prep_score 与 prep_high_score</a:t>
+            </a:r>
+          </a:p>
+          <a:p>
+            <a:r>
+              <a:rPr lang="zh-CN" dirty="0"/>
+              <a:t>· 把 round(score, -1) 去掉，看分数怎么变</a:t>
+            </a:r>
+          </a:p>
+          <a:p>
+            <a:r>
+              <a:rPr lang="zh-CN" dirty="0"/>
+              <a:t/>
+            </a:r>
+          </a:p>
+          <a:p>
+            <a:r>
+              <a:rPr lang="zh-CN" dirty="0"/>
+              <a:t>课后作业：</a:t>
+            </a:r>
+          </a:p>
+          <a:p>
+            <a:r>
+              <a:rPr lang="zh-CN" dirty="0"/>
+              <a:t>· 完成教材 14.3 全部动手练</a:t>
+            </a:r>
+          </a:p>
+          <a:p>
+            <a:r>
+              <a:rPr lang="zh-CN" dirty="0"/>
+              <a:t/>
+            </a:r>
+          </a:p>
+          <a:p>
+            <a:r>
+              <a:rPr lang="zh-CN" dirty="0"/>
+              <a:t>节奏：讲 20 分钟 → 学员自己敲 40 分钟（不看答案）→ 对讲评自查 20 分钟 → 写作业 10 分钟。</a:t>
+            </a:r>
+          </a:p>
+        </p:txBody>
+      </p:sp>
     </p:spTree>
   </p:cSld>
   <p:clrMapOvr>
@@ -834,6 +1222,74 @@
           </a:p>
         </p:txBody>
       </p:sp>
+      <p:sp>
+        <p:nvSpPr>
+          <p:cNvPr id="2" name="讲课提示"/>
+          <p:cNvSpPr txBox="1"/>
+          <p:nvPr/>
+        </p:nvSpPr>
+        <p:spPr>
+          <a:xfrm>
+            <a:off x="457200" y="457200"/>
+            <a:ext cx="6858000" cy="4800600"/>
+          </a:xfrm>
+          <a:prstGeom prst="rect">
+            <a:avLst/>
+          </a:prstGeom>
+        </p:spPr>
+        <p:txBody>
+          <a:bodyPr wrap="square"/>
+          <a:lstStyle/>
+          <a:p>
+            <a:r>
+              <a:rPr lang="zh-CN" dirty="0"/>
+              <a:t>第 76 节 · 核心知识点：记分牌与数据格式化</a:t>
+            </a:r>
+          </a:p>
+          <a:p>
+            <a:r>
+              <a:rPr lang="zh-CN" dirty="0"/>
+              <a:t/>
+            </a:r>
+          </a:p>
+          <a:p>
+            <a:r>
+              <a:rPr lang="zh-CN" dirty="0"/>
+              <a:t>讲这一页时：先让学生说出上节课的结论，再逐块讲要点。</a:t>
+            </a:r>
+          </a:p>
+          <a:p>
+            <a:r>
+              <a:rPr lang="zh-CN" dirty="0"/>
+              <a:t>每讲完一块，问一句「这一步如果写错了，报错会长什么样？」——把错误提前讲。</a:t>
+            </a:r>
+          </a:p>
+          <a:p>
+            <a:r>
+              <a:rPr lang="zh-CN" dirty="0"/>
+              <a:t/>
+            </a:r>
+          </a:p>
+          <a:p>
+            <a:r>
+              <a:rPr lang="zh-CN" dirty="0"/>
+              <a:t>本节目标：用 prep_* 方法把数据渲染成图像；掌握 round 和千分位格式化</a:t>
+            </a:r>
+          </a:p>
+          <a:p>
+            <a:r>
+              <a:rPr lang="zh-CN" dirty="0"/>
+              <a:t/>
+            </a:r>
+          </a:p>
+          <a:p>
+            <a:r>
+              <a:rPr lang="zh-CN" dirty="0"/>
+              <a:t>看不到懂的地方，回讲义对应小节读一遍，再回来对着这页复述一次——能讲出来才算真懂。</a:t>
+            </a:r>
+          </a:p>
+        </p:txBody>
+      </p:sp>
     </p:spTree>
   </p:cSld>
   <p:clrMapOvr>
@@ -957,6 +1413,104 @@
           </a:p>
         </p:txBody>
       </p:sp>
+      <p:sp>
+        <p:nvSpPr>
+          <p:cNvPr id="2" name="讲课提示"/>
+          <p:cNvSpPr txBox="1"/>
+          <p:nvPr/>
+        </p:nvSpPr>
+        <p:spPr>
+          <a:xfrm>
+            <a:off x="457200" y="457200"/>
+            <a:ext cx="6858000" cy="4800600"/>
+          </a:xfrm>
+          <a:prstGeom prst="rect">
+            <a:avLst/>
+          </a:prstGeom>
+        </p:spPr>
+        <p:txBody>
+          <a:bodyPr wrap="square"/>
+          <a:lstStyle/>
+          <a:p>
+            <a:r>
+              <a:rPr lang="zh-CN" dirty="0"/>
+              <a:t>第 77 节 · 动态难度与余下飞船数</a:t>
+            </a:r>
+          </a:p>
+          <a:p>
+            <a:r>
+              <a:rPr lang="zh-CN" dirty="0"/>
+              <a:t>单元 14 · Play 按钮与记分 · W17</a:t>
+            </a:r>
+          </a:p>
+          <a:p>
+            <a:r>
+              <a:rPr lang="zh-CN" dirty="0"/>
+              <a:t/>
+            </a:r>
+          </a:p>
+          <a:p>
+            <a:r>
+              <a:rPr lang="zh-CN" dirty="0"/>
+              <a:t>学习目标：理解 speedup_scale / score_scale 与 initialize_dynamic_settings 的配合</a:t>
+            </a:r>
+          </a:p>
+          <a:p>
+            <a:r>
+              <a:rPr lang="zh-CN" dirty="0"/>
+              <a:t/>
+            </a:r>
+          </a:p>
+          <a:p>
+            <a:r>
+              <a:rPr lang="zh-CN" dirty="0"/>
+              <a:t>课堂实操（40 分钟，不看答案）：</a:t>
+            </a:r>
+          </a:p>
+          <a:p>
+            <a:r>
+              <a:rPr lang="zh-CN" dirty="0"/>
+              <a:t>· 实现 increase_speed 并观察难度曲线</a:t>
+            </a:r>
+          </a:p>
+          <a:p>
+            <a:r>
+              <a:rPr lang="zh-CN" dirty="0"/>
+              <a:t>· 用 Group + 小 Ship 图标显示余下命数</a:t>
+            </a:r>
+          </a:p>
+          <a:p>
+            <a:r>
+              <a:rPr lang="zh-CN" dirty="0"/>
+              <a:t/>
+            </a:r>
+          </a:p>
+          <a:p>
+            <a:r>
+              <a:rPr lang="zh-CN" dirty="0"/>
+              <a:t>课后作业：</a:t>
+            </a:r>
+          </a:p>
+          <a:p>
+            <a:r>
+              <a:rPr lang="zh-CN" dirty="0"/>
+              <a:t>· ★ 完成动手项目：最高分做 JSON 持久化</a:t>
+            </a:r>
+          </a:p>
+          <a:p>
+            <a:r>
+              <a:rPr lang="zh-CN" dirty="0"/>
+              <a:t/>
+            </a:r>
+          </a:p>
+          <a:p>
+            <a:r>
+              <a:rPr lang="zh-CN" dirty="0"/>
+              <a:t>节奏：讲 20 分钟 → 学员自己敲 40 分钟（不看答案）→ 对讲评自查 20 分钟 → 写作业 10 分钟。</a:t>
+            </a:r>
+          </a:p>
+        </p:txBody>
+      </p:sp>
     </p:spTree>
   </p:cSld>
   <p:clrMapOvr>
@@ -1050,6 +1604,74 @@
           </a:p>
         </p:txBody>
       </p:sp>
+      <p:sp>
+        <p:nvSpPr>
+          <p:cNvPr id="2" name="讲课提示"/>
+          <p:cNvSpPr txBox="1"/>
+          <p:nvPr/>
+        </p:nvSpPr>
+        <p:spPr>
+          <a:xfrm>
+            <a:off x="457200" y="457200"/>
+            <a:ext cx="6858000" cy="4800600"/>
+          </a:xfrm>
+          <a:prstGeom prst="rect">
+            <a:avLst/>
+          </a:prstGeom>
+        </p:spPr>
+        <p:txBody>
+          <a:bodyPr wrap="square"/>
+          <a:lstStyle/>
+          <a:p>
+            <a:r>
+              <a:rPr lang="zh-CN" dirty="0"/>
+              <a:t>第 77 节 · 核心知识点：动态难度与余下飞船数</a:t>
+            </a:r>
+          </a:p>
+          <a:p>
+            <a:r>
+              <a:rPr lang="zh-CN" dirty="0"/>
+              <a:t/>
+            </a:r>
+          </a:p>
+          <a:p>
+            <a:r>
+              <a:rPr lang="zh-CN" dirty="0"/>
+              <a:t>讲这一页时：先让学生说出上节课的结论，再逐块讲要点。</a:t>
+            </a:r>
+          </a:p>
+          <a:p>
+            <a:r>
+              <a:rPr lang="zh-CN" dirty="0"/>
+              <a:t>每讲完一块，问一句「这一步如果写错了，报错会长什么样？」——把错误提前讲。</a:t>
+            </a:r>
+          </a:p>
+          <a:p>
+            <a:r>
+              <a:rPr lang="zh-CN" dirty="0"/>
+              <a:t/>
+            </a:r>
+          </a:p>
+          <a:p>
+            <a:r>
+              <a:rPr lang="zh-CN" dirty="0"/>
+              <a:t>本节目标：理解 speedup_scale / score_scale 与 initialize_dynamic_settings 的配合</a:t>
+            </a:r>
+          </a:p>
+          <a:p>
+            <a:r>
+              <a:rPr lang="zh-CN" dirty="0"/>
+              <a:t/>
+            </a:r>
+          </a:p>
+          <a:p>
+            <a:r>
+              <a:rPr lang="zh-CN" dirty="0"/>
+              <a:t>看不到懂的地方，回讲义对应小节读一遍，再回来对着这页复述一次——能讲出来才算真懂。</a:t>
+            </a:r>
+          </a:p>
+        </p:txBody>
+      </p:sp>
     </p:spTree>
   </p:cSld>
   <p:clrMapOvr>
@@ -1173,6 +1795,104 @@
           </a:p>
         </p:txBody>
       </p:sp>
+      <p:sp>
+        <p:nvSpPr>
+          <p:cNvPr id="2" name="讲课提示"/>
+          <p:cNvSpPr txBox="1"/>
+          <p:nvPr/>
+        </p:nvSpPr>
+        <p:spPr>
+          <a:xfrm>
+            <a:off x="457200" y="457200"/>
+            <a:ext cx="6858000" cy="4800600"/>
+          </a:xfrm>
+          <a:prstGeom prst="rect">
+            <a:avLst/>
+          </a:prstGeom>
+        </p:spPr>
+        <p:txBody>
+          <a:bodyPr wrap="square"/>
+          <a:lstStyle/>
+          <a:p>
+            <a:r>
+              <a:rPr lang="zh-CN" dirty="0"/>
+              <a:t>第 78 节 · 实战、答案与自查</a:t>
+            </a:r>
+          </a:p>
+          <a:p>
+            <a:r>
+              <a:rPr lang="zh-CN" dirty="0"/>
+              <a:t>单元 14 · Play 按钮与记分 · W17</a:t>
+            </a:r>
+          </a:p>
+          <a:p>
+            <a:r>
+              <a:rPr lang="zh-CN" dirty="0"/>
+              <a:t/>
+            </a:r>
+          </a:p>
+          <a:p>
+            <a:r>
+              <a:rPr lang="zh-CN" dirty="0"/>
+              <a:t>学习目标：独立完成单元 14 练习，逐条自查常见错误</a:t>
+            </a:r>
+          </a:p>
+          <a:p>
+            <a:r>
+              <a:rPr lang="zh-CN" dirty="0"/>
+              <a:t/>
+            </a:r>
+          </a:p>
+          <a:p>
+            <a:r>
+              <a:rPr lang="zh-CN" dirty="0"/>
+              <a:t>课堂实操（40 分钟，不看答案）：</a:t>
+            </a:r>
+          </a:p>
+          <a:p>
+            <a:r>
+              <a:rPr lang="zh-CN" dirty="0"/>
+              <a:t>· 限时 30 分钟独立完成基础档</a:t>
+            </a:r>
+          </a:p>
+          <a:p>
+            <a:r>
+              <a:rPr lang="zh-CN" dirty="0"/>
+              <a:t>· 逐条演示六、里的每个错误</a:t>
+            </a:r>
+          </a:p>
+          <a:p>
+            <a:r>
+              <a:rPr lang="zh-CN" dirty="0"/>
+              <a:t/>
+            </a:r>
+          </a:p>
+          <a:p>
+            <a:r>
+              <a:rPr lang="zh-CN" dirty="0"/>
+              <a:t>课后作业：</a:t>
+            </a:r>
+          </a:p>
+          <a:p>
+            <a:r>
+              <a:rPr lang="zh-CN" dirty="0"/>
+              <a:t>· ★ 产出：带 Play 按钮与完整记分牌的外星人入侵</a:t>
+            </a:r>
+          </a:p>
+          <a:p>
+            <a:r>
+              <a:rPr lang="zh-CN" dirty="0"/>
+              <a:t/>
+            </a:r>
+          </a:p>
+          <a:p>
+            <a:r>
+              <a:rPr lang="zh-CN" dirty="0"/>
+              <a:t>节奏：讲 20 分钟 → 学员自己敲 40 分钟（不看答案）→ 对讲评自查 20 分钟 → 写作业 10 分钟。</a:t>
+            </a:r>
+          </a:p>
+        </p:txBody>
+      </p:sp>
     </p:spTree>
   </p:cSld>
   <p:clrMapOvr>
@@ -1198,6 +1918,74 @@
           <a:chExt cx="0" cy="0"/>
         </a:xfrm>
       </p:grpSpPr>
+      <p:sp>
+        <p:nvSpPr>
+          <p:cNvPr id="2" name="讲课提示"/>
+          <p:cNvSpPr txBox="1"/>
+          <p:nvPr/>
+        </p:nvSpPr>
+        <p:spPr>
+          <a:xfrm>
+            <a:off x="457200" y="457200"/>
+            <a:ext cx="6858000" cy="4800600"/>
+          </a:xfrm>
+          <a:prstGeom prst="rect">
+            <a:avLst/>
+          </a:prstGeom>
+        </p:spPr>
+        <p:txBody>
+          <a:bodyPr wrap="square"/>
+          <a:lstStyle/>
+          <a:p>
+            <a:r>
+              <a:rPr lang="zh-CN" dirty="0"/>
+              <a:t>第 78 节 · 核心知识点：实战、答案与自查</a:t>
+            </a:r>
+          </a:p>
+          <a:p>
+            <a:r>
+              <a:rPr lang="zh-CN" dirty="0"/>
+              <a:t/>
+            </a:r>
+          </a:p>
+          <a:p>
+            <a:r>
+              <a:rPr lang="zh-CN" dirty="0"/>
+              <a:t>讲这一页时：先让学生说出上节课的结论，再逐块讲要点。</a:t>
+            </a:r>
+          </a:p>
+          <a:p>
+            <a:r>
+              <a:rPr lang="zh-CN" dirty="0"/>
+              <a:t>每讲完一块，问一句「这一步如果写错了，报错会长什么样？」——把错误提前讲。</a:t>
+            </a:r>
+          </a:p>
+          <a:p>
+            <a:r>
+              <a:rPr lang="zh-CN" dirty="0"/>
+              <a:t/>
+            </a:r>
+          </a:p>
+          <a:p>
+            <a:r>
+              <a:rPr lang="zh-CN" dirty="0"/>
+              <a:t>本节目标：独立完成单元 14 练习，逐条自查常见错误</a:t>
+            </a:r>
+          </a:p>
+          <a:p>
+            <a:r>
+              <a:rPr lang="zh-CN" dirty="0"/>
+              <a:t/>
+            </a:r>
+          </a:p>
+          <a:p>
+            <a:r>
+              <a:rPr lang="zh-CN" dirty="0"/>
+              <a:t>看不到懂的地方，回讲义对应小节读一遍，再回来对着这页复述一次——能讲出来才算真懂。</a:t>
+            </a:r>
+          </a:p>
+        </p:txBody>
+      </p:sp>
       <p:sp>
         <p:nvSpPr>
           <p:cNvPr id="2" name="讲课提示"/>

--- a/python-course-ppt/逐节课件/Python讲授课件-单元14.pptx
+++ b/python-course-ppt/逐节课件/Python讲授课件-单元14.pptx
@@ -236,1832 +236,6 @@
 </p:notesMaster>
 </file>
 
-<file path=ppt/notesSlides/notesSlide1.xml><?xml version="1.0" encoding="utf-8"?>
-<p:notes xmlns:a="http://schemas.openxmlformats.org/drawingml/2006/main" xmlns:p="http://schemas.openxmlformats.org/presentationml/2006/main" xmlns:r="http://schemas.openxmlformats.org/officeDocument/2006/relationships">
-  <p:cSld>
-    <p:spTree>
-      <p:nvGrpSpPr>
-        <p:cNvPr id="1" name=""/>
-        <p:cNvGrpSpPr/>
-        <p:nvPr/>
-      </p:nvGrpSpPr>
-      <p:grpSpPr>
-        <a:xfrm>
-          <a:off x="0" y="0"/>
-          <a:ext cx="0" cy="0"/>
-          <a:chOff x="0" y="0"/>
-          <a:chExt cx="0" cy="0"/>
-        </a:xfrm>
-      </p:grpSpPr>
-      <p:sp>
-        <p:nvSpPr>
-          <p:cNvPr id="2" name="讲课提示"/>
-          <p:cNvSpPr txBox="1"/>
-          <p:nvPr/>
-        </p:nvSpPr>
-        <p:spPr>
-          <a:xfrm>
-            <a:off x="457200" y="457200"/>
-            <a:ext cx="6858000" cy="4800600"/>
-          </a:xfrm>
-          <a:prstGeom prst="rect">
-            <a:avLst/>
-          </a:prstGeom>
-        </p:spPr>
-        <p:txBody>
-          <a:bodyPr wrap="square"/>
-          <a:lstStyle/>
-          <a:p>
-            <a:r>
-              <a:rPr lang="zh-CN" dirty="0"/>
-              <a:t>单元 14 · 单元 14 · Play 按钮与记分</a:t>
-            </a:r>
-          </a:p>
-          <a:p>
-            <a:r>
-              <a:rPr lang="zh-CN" dirty="0"/>
-              <a:t/>
-            </a:r>
-          </a:p>
-          <a:p>
-            <a:r>
-              <a:rPr lang="zh-CN" dirty="0"/>
-              <a:t>本单元包含以下课节：</a:t>
-            </a:r>
-          </a:p>
-          <a:p>
-            <a:r>
-              <a:rPr lang="zh-CN" dirty="0"/>
-              <a:t>· 第 75 节 游戏状态机与 Button 类</a:t>
-            </a:r>
-          </a:p>
-          <a:p>
-            <a:r>
-              <a:rPr lang="zh-CN" dirty="0"/>
-              <a:t>· 第 76 节 记分牌与数据格式化</a:t>
-            </a:r>
-          </a:p>
-          <a:p>
-            <a:r>
-              <a:rPr lang="zh-CN" dirty="0"/>
-              <a:t>· 第 77 节 动态难度与余下飞船数</a:t>
-            </a:r>
-          </a:p>
-          <a:p>
-            <a:r>
-              <a:rPr lang="zh-CN" dirty="0"/>
-              <a:t>· 第 78 节 实战、答案与自查</a:t>
-            </a:r>
-          </a:p>
-          <a:p>
-            <a:r>
-              <a:rPr lang="zh-CN" dirty="0"/>
-              <a:t/>
-            </a:r>
-          </a:p>
-          <a:p>
-            <a:r>
-              <a:rPr lang="zh-CN" dirty="0"/>
-              <a:t>开场用 3 分钟讲清：这个单元学完能做出什么，最后会被关卡怎么验。</a:t>
-            </a:r>
-          </a:p>
-        </p:txBody>
-      </p:sp>
-      <p:sp>
-        <p:nvSpPr>
-          <p:cNvPr id="2" name="讲课提示"/>
-          <p:cNvSpPr txBox="1"/>
-          <p:nvPr/>
-        </p:nvSpPr>
-        <p:spPr>
-          <a:xfrm>
-            <a:off x="457200" y="457200"/>
-            <a:ext cx="6858000" cy="4800600"/>
-          </a:xfrm>
-          <a:prstGeom prst="rect">
-            <a:avLst/>
-          </a:prstGeom>
-        </p:spPr>
-        <p:txBody>
-          <a:bodyPr wrap="square"/>
-          <a:lstStyle/>
-          <a:p>
-            <a:r>
-              <a:rPr lang="zh-CN" dirty="0"/>
-              <a:t>单元 14 · 单元 14 · Play 按钮与记分</a:t>
-            </a:r>
-          </a:p>
-          <a:p>
-            <a:r>
-              <a:rPr lang="zh-CN" dirty="0"/>
-              <a:t/>
-            </a:r>
-          </a:p>
-          <a:p>
-            <a:r>
-              <a:rPr lang="zh-CN" dirty="0"/>
-              <a:t>本单元包含以下课节：</a:t>
-            </a:r>
-          </a:p>
-          <a:p>
-            <a:r>
-              <a:rPr lang="zh-CN" dirty="0"/>
-              <a:t>· 第 75 节 游戏状态机与 Button 类</a:t>
-            </a:r>
-          </a:p>
-          <a:p>
-            <a:r>
-              <a:rPr lang="zh-CN" dirty="0"/>
-              <a:t>· 第 76 节 记分牌与数据格式化</a:t>
-            </a:r>
-          </a:p>
-          <a:p>
-            <a:r>
-              <a:rPr lang="zh-CN" dirty="0"/>
-              <a:t>· 第 77 节 动态难度与余下飞船数</a:t>
-            </a:r>
-          </a:p>
-          <a:p>
-            <a:r>
-              <a:rPr lang="zh-CN" dirty="0"/>
-              <a:t>· 第 78 节 实战、答案与自查</a:t>
-            </a:r>
-          </a:p>
-          <a:p>
-            <a:r>
-              <a:rPr lang="zh-CN" dirty="0"/>
-              <a:t/>
-            </a:r>
-          </a:p>
-          <a:p>
-            <a:r>
-              <a:rPr lang="zh-CN" dirty="0"/>
-              <a:t>开场用 3 分钟讲清：这个单元学完能做出什么，最后会被关卡怎么验。</a:t>
-            </a:r>
-          </a:p>
-        </p:txBody>
-      </p:sp>
-    </p:spTree>
-  </p:cSld>
-  <p:clrMapOvr>
-    <a:masterClrMapping/>
-  </p:clrMapOvr>
-</p:notes>
-</file>
-
-<file path=ppt/notesSlides/notesSlide10.xml><?xml version="1.0" encoding="utf-8"?>
-<p:notes xmlns:a="http://schemas.openxmlformats.org/drawingml/2006/main" xmlns:p="http://schemas.openxmlformats.org/presentationml/2006/main" xmlns:r="http://schemas.openxmlformats.org/officeDocument/2006/relationships">
-  <p:cSld>
-    <p:spTree>
-      <p:nvGrpSpPr>
-        <p:cNvPr id="1" name=""/>
-        <p:cNvGrpSpPr/>
-        <p:nvPr/>
-      </p:nvGrpSpPr>
-      <p:grpSpPr>
-        <a:xfrm>
-          <a:off x="0" y="0"/>
-          <a:ext cx="0" cy="0"/>
-          <a:chOff x="0" y="0"/>
-          <a:chExt cx="0" cy="0"/>
-        </a:xfrm>
-      </p:grpSpPr>
-      <p:sp>
-        <p:nvSpPr>
-          <p:cNvPr id="2" name="讲课提示"/>
-          <p:cNvSpPr txBox="1"/>
-          <p:nvPr/>
-        </p:nvSpPr>
-        <p:spPr>
-          <a:xfrm>
-            <a:off x="457200" y="457200"/>
-            <a:ext cx="6858000" cy="4800600"/>
-          </a:xfrm>
-          <a:prstGeom prst="rect">
-            <a:avLst/>
-          </a:prstGeom>
-        </p:spPr>
-        <p:txBody>
-          <a:bodyPr wrap="square"/>
-          <a:lstStyle/>
-          <a:p>
-            <a:r>
-              <a:rPr lang="zh-CN" dirty="0"/>
-              <a:t>单元 14 小结 · 单元 14 · 小结</a:t>
-            </a:r>
-          </a:p>
-          <a:p>
-            <a:r>
-              <a:rPr lang="zh-CN" dirty="0"/>
-              <a:t/>
-            </a:r>
-          </a:p>
-          <a:p>
-            <a:r>
-              <a:rPr lang="zh-CN" dirty="0"/>
-              <a:t>收尾动作：让学生合上讲义，口述本单元三个最重要的结论；说不出来的，回对应课节。</a:t>
-            </a:r>
-          </a:p>
-          <a:p>
-            <a:r>
-              <a:rPr lang="zh-CN" dirty="0"/>
-              <a:t>然后当场勾一遍本单元课节的「已完成」，没打勾的进下一单元前补掉。</a:t>
-            </a:r>
-          </a:p>
-        </p:txBody>
-      </p:sp>
-      <p:sp>
-        <p:nvSpPr>
-          <p:cNvPr id="2" name="讲课提示"/>
-          <p:cNvSpPr txBox="1"/>
-          <p:nvPr/>
-        </p:nvSpPr>
-        <p:spPr>
-          <a:xfrm>
-            <a:off x="457200" y="457200"/>
-            <a:ext cx="6858000" cy="4800600"/>
-          </a:xfrm>
-          <a:prstGeom prst="rect">
-            <a:avLst/>
-          </a:prstGeom>
-        </p:spPr>
-        <p:txBody>
-          <a:bodyPr wrap="square"/>
-          <a:lstStyle/>
-          <a:p>
-            <a:r>
-              <a:rPr lang="zh-CN" dirty="0"/>
-              <a:t>单元 14 小结 · 单元 14 · 小结</a:t>
-            </a:r>
-          </a:p>
-          <a:p>
-            <a:r>
-              <a:rPr lang="zh-CN" dirty="0"/>
-              <a:t/>
-            </a:r>
-          </a:p>
-          <a:p>
-            <a:r>
-              <a:rPr lang="zh-CN" dirty="0"/>
-              <a:t>收尾动作：让学生合上讲义，口述本单元三个最重要的结论；说不出来的，回对应课节。</a:t>
-            </a:r>
-          </a:p>
-          <a:p>
-            <a:r>
-              <a:rPr lang="zh-CN" dirty="0"/>
-              <a:t>然后当场勾一遍本单元课节的「已完成」，没打勾的进下一单元前补掉。</a:t>
-            </a:r>
-          </a:p>
-        </p:txBody>
-      </p:sp>
-    </p:spTree>
-  </p:cSld>
-  <p:clrMapOvr>
-    <a:masterClrMapping/>
-  </p:clrMapOvr>
-</p:notes>
-</file>
-
-<file path=ppt/notesSlides/notesSlide2.xml><?xml version="1.0" encoding="utf-8"?>
-<p:notes xmlns:a="http://schemas.openxmlformats.org/drawingml/2006/main" xmlns:p="http://schemas.openxmlformats.org/presentationml/2006/main" xmlns:r="http://schemas.openxmlformats.org/officeDocument/2006/relationships">
-  <p:cSld>
-    <p:spTree>
-      <p:nvGrpSpPr>
-        <p:cNvPr id="1" name=""/>
-        <p:cNvGrpSpPr/>
-        <p:nvPr/>
-      </p:nvGrpSpPr>
-      <p:grpSpPr>
-        <a:xfrm>
-          <a:off x="0" y="0"/>
-          <a:ext cx="0" cy="0"/>
-          <a:chOff x="0" y="0"/>
-          <a:chExt cx="0" cy="0"/>
-        </a:xfrm>
-      </p:grpSpPr>
-      <p:sp>
-        <p:nvSpPr>
-          <p:cNvPr id="2" name="讲课提示"/>
-          <p:cNvSpPr txBox="1"/>
-          <p:nvPr/>
-        </p:nvSpPr>
-        <p:spPr>
-          <a:xfrm>
-            <a:off x="457200" y="457200"/>
-            <a:ext cx="6858000" cy="4800600"/>
-          </a:xfrm>
-          <a:prstGeom prst="rect">
-            <a:avLst/>
-          </a:prstGeom>
-        </p:spPr>
-        <p:txBody>
-          <a:bodyPr wrap="square"/>
-          <a:lstStyle/>
-          <a:p>
-            <a:r>
-              <a:rPr lang="zh-CN" dirty="0"/>
-              <a:t>第 75 节 · 游戏状态机与 Button 类</a:t>
-            </a:r>
-          </a:p>
-          <a:p>
-            <a:r>
-              <a:rPr lang="zh-CN" dirty="0"/>
-              <a:t>单元 14 · Play 按钮与记分 · W16–W17</a:t>
-            </a:r>
-          </a:p>
-          <a:p>
-            <a:r>
-              <a:rPr lang="zh-CN" dirty="0"/>
-              <a:t/>
-            </a:r>
-          </a:p>
-          <a:p>
-            <a:r>
-              <a:rPr lang="zh-CN" dirty="0"/>
-              <a:t>学习目标：把游戏做成 inactive / active / game over 三态；理解 font.render 才能显示文字</a:t>
-            </a:r>
-          </a:p>
-          <a:p>
-            <a:r>
-              <a:rPr lang="zh-CN" dirty="0"/>
-              <a:t/>
-            </a:r>
-          </a:p>
-          <a:p>
-            <a:r>
-              <a:rPr lang="zh-CN" dirty="0"/>
-              <a:t>课堂实操（40 分钟，不看答案）：</a:t>
-            </a:r>
-          </a:p>
-          <a:p>
-            <a:r>
-              <a:rPr lang="zh-CN" dirty="0"/>
-              <a:t>· 现场写 Button 类并让它响应点击</a:t>
-            </a:r>
-          </a:p>
-          <a:p>
-            <a:r>
-              <a:rPr lang="zh-CN" dirty="0"/>
-              <a:t>· 把 stats.game_active 注释掉，看游戏怎么变</a:t>
-            </a:r>
-          </a:p>
-          <a:p>
-            <a:r>
-              <a:rPr lang="zh-CN" dirty="0"/>
-              <a:t>· 故意点 Play 两次，看会重置几次</a:t>
-            </a:r>
-          </a:p>
-          <a:p>
-            <a:r>
-              <a:rPr lang="zh-CN" dirty="0"/>
-              <a:t/>
-            </a:r>
-          </a:p>
-          <a:p>
-            <a:r>
-              <a:rPr lang="zh-CN" dirty="0"/>
-              <a:t>课后作业：</a:t>
-            </a:r>
-          </a:p>
-          <a:p>
-            <a:r>
-              <a:rPr lang="zh-CN" dirty="0"/>
-              <a:t>· 完成教材 14.1 全部动手练</a:t>
-            </a:r>
-          </a:p>
-          <a:p>
-            <a:r>
-              <a:rPr lang="zh-CN" dirty="0"/>
-              <a:t/>
-            </a:r>
-          </a:p>
-          <a:p>
-            <a:r>
-              <a:rPr lang="zh-CN" dirty="0"/>
-              <a:t>节奏：讲 20 分钟 → 学员自己敲 40 分钟（不看答案）→ 对讲评自查 20 分钟 → 写作业 10 分钟。</a:t>
-            </a:r>
-          </a:p>
-        </p:txBody>
-      </p:sp>
-      <p:sp>
-        <p:nvSpPr>
-          <p:cNvPr id="2" name="讲课提示"/>
-          <p:cNvSpPr txBox="1"/>
-          <p:nvPr/>
-        </p:nvSpPr>
-        <p:spPr>
-          <a:xfrm>
-            <a:off x="457200" y="457200"/>
-            <a:ext cx="6858000" cy="4800600"/>
-          </a:xfrm>
-          <a:prstGeom prst="rect">
-            <a:avLst/>
-          </a:prstGeom>
-        </p:spPr>
-        <p:txBody>
-          <a:bodyPr wrap="square"/>
-          <a:lstStyle/>
-          <a:p>
-            <a:r>
-              <a:rPr lang="zh-CN" dirty="0"/>
-              <a:t>第 75 节 · 游戏状态机与 Button 类</a:t>
-            </a:r>
-          </a:p>
-          <a:p>
-            <a:r>
-              <a:rPr lang="zh-CN" dirty="0"/>
-              <a:t>单元 14 · Play 按钮与记分 · W16–W17</a:t>
-            </a:r>
-          </a:p>
-          <a:p>
-            <a:r>
-              <a:rPr lang="zh-CN" dirty="0"/>
-              <a:t/>
-            </a:r>
-          </a:p>
-          <a:p>
-            <a:r>
-              <a:rPr lang="zh-CN" dirty="0"/>
-              <a:t>学习目标：把游戏做成 inactive / active / game over 三态；理解 font.render 才能显示文字</a:t>
-            </a:r>
-          </a:p>
-          <a:p>
-            <a:r>
-              <a:rPr lang="zh-CN" dirty="0"/>
-              <a:t/>
-            </a:r>
-          </a:p>
-          <a:p>
-            <a:r>
-              <a:rPr lang="zh-CN" dirty="0"/>
-              <a:t>课堂实操（40 分钟，不看答案）：</a:t>
-            </a:r>
-          </a:p>
-          <a:p>
-            <a:r>
-              <a:rPr lang="zh-CN" dirty="0"/>
-              <a:t>· 现场写 Button 类并让它响应点击</a:t>
-            </a:r>
-          </a:p>
-          <a:p>
-            <a:r>
-              <a:rPr lang="zh-CN" dirty="0"/>
-              <a:t>· 把 stats.game_active 注释掉，看游戏怎么变</a:t>
-            </a:r>
-          </a:p>
-          <a:p>
-            <a:r>
-              <a:rPr lang="zh-CN" dirty="0"/>
-              <a:t>· 故意点 Play 两次，看会重置几次</a:t>
-            </a:r>
-          </a:p>
-          <a:p>
-            <a:r>
-              <a:rPr lang="zh-CN" dirty="0"/>
-              <a:t/>
-            </a:r>
-          </a:p>
-          <a:p>
-            <a:r>
-              <a:rPr lang="zh-CN" dirty="0"/>
-              <a:t>课后作业：</a:t>
-            </a:r>
-          </a:p>
-          <a:p>
-            <a:r>
-              <a:rPr lang="zh-CN" dirty="0"/>
-              <a:t>· 完成教材 14.1 全部动手练</a:t>
-            </a:r>
-          </a:p>
-          <a:p>
-            <a:r>
-              <a:rPr lang="zh-CN" dirty="0"/>
-              <a:t/>
-            </a:r>
-          </a:p>
-          <a:p>
-            <a:r>
-              <a:rPr lang="zh-CN" dirty="0"/>
-              <a:t>节奏：讲 20 分钟 → 学员自己敲 40 分钟（不看答案）→ 对讲评自查 20 分钟 → 写作业 10 分钟。</a:t>
-            </a:r>
-          </a:p>
-        </p:txBody>
-      </p:sp>
-    </p:spTree>
-  </p:cSld>
-  <p:clrMapOvr>
-    <a:masterClrMapping/>
-  </p:clrMapOvr>
-</p:notes>
-</file>
-
-<file path=ppt/notesSlides/notesSlide3.xml><?xml version="1.0" encoding="utf-8"?>
-<p:notes xmlns:a="http://schemas.openxmlformats.org/drawingml/2006/main" xmlns:p="http://schemas.openxmlformats.org/presentationml/2006/main" xmlns:r="http://schemas.openxmlformats.org/officeDocument/2006/relationships">
-  <p:cSld>
-    <p:spTree>
-      <p:nvGrpSpPr>
-        <p:cNvPr id="1" name=""/>
-        <p:cNvGrpSpPr/>
-        <p:nvPr/>
-      </p:nvGrpSpPr>
-      <p:grpSpPr>
-        <a:xfrm>
-          <a:off x="0" y="0"/>
-          <a:ext cx="0" cy="0"/>
-          <a:chOff x="0" y="0"/>
-          <a:chExt cx="0" cy="0"/>
-        </a:xfrm>
-      </p:grpSpPr>
-      <p:sp>
-        <p:nvSpPr>
-          <p:cNvPr id="2" name="讲课提示"/>
-          <p:cNvSpPr txBox="1"/>
-          <p:nvPr/>
-        </p:nvSpPr>
-        <p:spPr>
-          <a:xfrm>
-            <a:off x="457200" y="457200"/>
-            <a:ext cx="6858000" cy="4800600"/>
-          </a:xfrm>
-          <a:prstGeom prst="rect">
-            <a:avLst/>
-          </a:prstGeom>
-        </p:spPr>
-        <p:txBody>
-          <a:bodyPr wrap="square"/>
-          <a:lstStyle/>
-          <a:p>
-            <a:r>
-              <a:rPr lang="zh-CN" dirty="0"/>
-              <a:t>第 75 节 · 核心知识点：游戏状态机与 Button 类</a:t>
-            </a:r>
-          </a:p>
-          <a:p>
-            <a:r>
-              <a:rPr lang="zh-CN" dirty="0"/>
-              <a:t/>
-            </a:r>
-          </a:p>
-          <a:p>
-            <a:r>
-              <a:rPr lang="zh-CN" dirty="0"/>
-              <a:t>讲这一页时：先让学生说出上节课的结论，再逐块讲要点。</a:t>
-            </a:r>
-          </a:p>
-          <a:p>
-            <a:r>
-              <a:rPr lang="zh-CN" dirty="0"/>
-              <a:t>每讲完一块，问一句「这一步如果写错了，报错会长什么样？」——把错误提前讲。</a:t>
-            </a:r>
-          </a:p>
-          <a:p>
-            <a:r>
-              <a:rPr lang="zh-CN" dirty="0"/>
-              <a:t/>
-            </a:r>
-          </a:p>
-          <a:p>
-            <a:r>
-              <a:rPr lang="zh-CN" dirty="0"/>
-              <a:t>本节目标：把游戏做成 inactive / active / game over 三态；理解 font.render 才能显示文字</a:t>
-            </a:r>
-          </a:p>
-          <a:p>
-            <a:r>
-              <a:rPr lang="zh-CN" dirty="0"/>
-              <a:t/>
-            </a:r>
-          </a:p>
-          <a:p>
-            <a:r>
-              <a:rPr lang="zh-CN" dirty="0"/>
-              <a:t>看不到懂的地方，回讲义对应小节读一遍，再回来对着这页复述一次——能讲出来才算真懂。</a:t>
-            </a:r>
-          </a:p>
-        </p:txBody>
-      </p:sp>
-      <p:sp>
-        <p:nvSpPr>
-          <p:cNvPr id="2" name="讲课提示"/>
-          <p:cNvSpPr txBox="1"/>
-          <p:nvPr/>
-        </p:nvSpPr>
-        <p:spPr>
-          <a:xfrm>
-            <a:off x="457200" y="457200"/>
-            <a:ext cx="6858000" cy="4800600"/>
-          </a:xfrm>
-          <a:prstGeom prst="rect">
-            <a:avLst/>
-          </a:prstGeom>
-        </p:spPr>
-        <p:txBody>
-          <a:bodyPr wrap="square"/>
-          <a:lstStyle/>
-          <a:p>
-            <a:r>
-              <a:rPr lang="zh-CN" dirty="0"/>
-              <a:t>第 75 节 · 核心知识点：游戏状态机与 Button 类</a:t>
-            </a:r>
-          </a:p>
-          <a:p>
-            <a:r>
-              <a:rPr lang="zh-CN" dirty="0"/>
-              <a:t/>
-            </a:r>
-          </a:p>
-          <a:p>
-            <a:r>
-              <a:rPr lang="zh-CN" dirty="0"/>
-              <a:t>讲这一页时：先让学生说出上节课的结论，再逐块讲要点。</a:t>
-            </a:r>
-          </a:p>
-          <a:p>
-            <a:r>
-              <a:rPr lang="zh-CN" dirty="0"/>
-              <a:t>每讲完一块，问一句「这一步如果写错了，报错会长什么样？」——把错误提前讲。</a:t>
-            </a:r>
-          </a:p>
-          <a:p>
-            <a:r>
-              <a:rPr lang="zh-CN" dirty="0"/>
-              <a:t/>
-            </a:r>
-          </a:p>
-          <a:p>
-            <a:r>
-              <a:rPr lang="zh-CN" dirty="0"/>
-              <a:t>本节目标：把游戏做成 inactive / active / game over 三态；理解 font.render 才能显示文字</a:t>
-            </a:r>
-          </a:p>
-          <a:p>
-            <a:r>
-              <a:rPr lang="zh-CN" dirty="0"/>
-              <a:t/>
-            </a:r>
-          </a:p>
-          <a:p>
-            <a:r>
-              <a:rPr lang="zh-CN" dirty="0"/>
-              <a:t>看不到懂的地方，回讲义对应小节读一遍，再回来对着这页复述一次——能讲出来才算真懂。</a:t>
-            </a:r>
-          </a:p>
-        </p:txBody>
-      </p:sp>
-    </p:spTree>
-  </p:cSld>
-  <p:clrMapOvr>
-    <a:masterClrMapping/>
-  </p:clrMapOvr>
-</p:notes>
-</file>
-
-<file path=ppt/notesSlides/notesSlide4.xml><?xml version="1.0" encoding="utf-8"?>
-<p:notes xmlns:a="http://schemas.openxmlformats.org/drawingml/2006/main" xmlns:p="http://schemas.openxmlformats.org/presentationml/2006/main" xmlns:r="http://schemas.openxmlformats.org/officeDocument/2006/relationships">
-  <p:cSld>
-    <p:spTree>
-      <p:nvGrpSpPr>
-        <p:cNvPr id="1" name=""/>
-        <p:cNvGrpSpPr/>
-        <p:nvPr/>
-      </p:nvGrpSpPr>
-      <p:grpSpPr>
-        <a:xfrm>
-          <a:off x="0" y="0"/>
-          <a:ext cx="0" cy="0"/>
-          <a:chOff x="0" y="0"/>
-          <a:chExt cx="0" cy="0"/>
-        </a:xfrm>
-      </p:grpSpPr>
-      <p:sp>
-        <p:nvSpPr>
-          <p:cNvPr id="2" name="讲课提示"/>
-          <p:cNvSpPr txBox="1"/>
-          <p:nvPr/>
-        </p:nvSpPr>
-        <p:spPr>
-          <a:xfrm>
-            <a:off x="457200" y="457200"/>
-            <a:ext cx="6858000" cy="4800600"/>
-          </a:xfrm>
-          <a:prstGeom prst="rect">
-            <a:avLst/>
-          </a:prstGeom>
-        </p:spPr>
-        <p:txBody>
-          <a:bodyPr wrap="square"/>
-          <a:lstStyle/>
-          <a:p>
-            <a:r>
-              <a:rPr lang="zh-CN" dirty="0"/>
-              <a:t>第 76 节 · 记分牌与数据格式化</a:t>
-            </a:r>
-          </a:p>
-          <a:p>
-            <a:r>
-              <a:rPr lang="zh-CN" dirty="0"/>
-              <a:t>单元 14 · Play 按钮与记分 · W17</a:t>
-            </a:r>
-          </a:p>
-          <a:p>
-            <a:r>
-              <a:rPr lang="zh-CN" dirty="0"/>
-              <a:t/>
-            </a:r>
-          </a:p>
-          <a:p>
-            <a:r>
-              <a:rPr lang="zh-CN" dirty="0"/>
-              <a:t>学习目标：用 prep_* 方法把数据渲染成图像；掌握 round 和千分位格式化</a:t>
-            </a:r>
-          </a:p>
-          <a:p>
-            <a:r>
-              <a:rPr lang="zh-CN" dirty="0"/>
-              <a:t/>
-            </a:r>
-          </a:p>
-          <a:p>
-            <a:r>
-              <a:rPr lang="zh-CN" dirty="0"/>
-              <a:t>课堂实操（40 分钟，不看答案）：</a:t>
-            </a:r>
-          </a:p>
-          <a:p>
-            <a:r>
-              <a:rPr lang="zh-CN" dirty="0"/>
-              <a:t>· 实现 prep_score 与 prep_high_score</a:t>
-            </a:r>
-          </a:p>
-          <a:p>
-            <a:r>
-              <a:rPr lang="zh-CN" dirty="0"/>
-              <a:t>· 把 round(score, -1) 去掉，看分数怎么变</a:t>
-            </a:r>
-          </a:p>
-          <a:p>
-            <a:r>
-              <a:rPr lang="zh-CN" dirty="0"/>
-              <a:t/>
-            </a:r>
-          </a:p>
-          <a:p>
-            <a:r>
-              <a:rPr lang="zh-CN" dirty="0"/>
-              <a:t>课后作业：</a:t>
-            </a:r>
-          </a:p>
-          <a:p>
-            <a:r>
-              <a:rPr lang="zh-CN" dirty="0"/>
-              <a:t>· 完成教材 14.3 全部动手练</a:t>
-            </a:r>
-          </a:p>
-          <a:p>
-            <a:r>
-              <a:rPr lang="zh-CN" dirty="0"/>
-              <a:t/>
-            </a:r>
-          </a:p>
-          <a:p>
-            <a:r>
-              <a:rPr lang="zh-CN" dirty="0"/>
-              <a:t>节奏：讲 20 分钟 → 学员自己敲 40 分钟（不看答案）→ 对讲评自查 20 分钟 → 写作业 10 分钟。</a:t>
-            </a:r>
-          </a:p>
-        </p:txBody>
-      </p:sp>
-      <p:sp>
-        <p:nvSpPr>
-          <p:cNvPr id="2" name="讲课提示"/>
-          <p:cNvSpPr txBox="1"/>
-          <p:nvPr/>
-        </p:nvSpPr>
-        <p:spPr>
-          <a:xfrm>
-            <a:off x="457200" y="457200"/>
-            <a:ext cx="6858000" cy="4800600"/>
-          </a:xfrm>
-          <a:prstGeom prst="rect">
-            <a:avLst/>
-          </a:prstGeom>
-        </p:spPr>
-        <p:txBody>
-          <a:bodyPr wrap="square"/>
-          <a:lstStyle/>
-          <a:p>
-            <a:r>
-              <a:rPr lang="zh-CN" dirty="0"/>
-              <a:t>第 76 节 · 记分牌与数据格式化</a:t>
-            </a:r>
-          </a:p>
-          <a:p>
-            <a:r>
-              <a:rPr lang="zh-CN" dirty="0"/>
-              <a:t>单元 14 · Play 按钮与记分 · W17</a:t>
-            </a:r>
-          </a:p>
-          <a:p>
-            <a:r>
-              <a:rPr lang="zh-CN" dirty="0"/>
-              <a:t/>
-            </a:r>
-          </a:p>
-          <a:p>
-            <a:r>
-              <a:rPr lang="zh-CN" dirty="0"/>
-              <a:t>学习目标：用 prep_* 方法把数据渲染成图像；掌握 round 和千分位格式化</a:t>
-            </a:r>
-          </a:p>
-          <a:p>
-            <a:r>
-              <a:rPr lang="zh-CN" dirty="0"/>
-              <a:t/>
-            </a:r>
-          </a:p>
-          <a:p>
-            <a:r>
-              <a:rPr lang="zh-CN" dirty="0"/>
-              <a:t>课堂实操（40 分钟，不看答案）：</a:t>
-            </a:r>
-          </a:p>
-          <a:p>
-            <a:r>
-              <a:rPr lang="zh-CN" dirty="0"/>
-              <a:t>· 实现 prep_score 与 prep_high_score</a:t>
-            </a:r>
-          </a:p>
-          <a:p>
-            <a:r>
-              <a:rPr lang="zh-CN" dirty="0"/>
-              <a:t>· 把 round(score, -1) 去掉，看分数怎么变</a:t>
-            </a:r>
-          </a:p>
-          <a:p>
-            <a:r>
-              <a:rPr lang="zh-CN" dirty="0"/>
-              <a:t/>
-            </a:r>
-          </a:p>
-          <a:p>
-            <a:r>
-              <a:rPr lang="zh-CN" dirty="0"/>
-              <a:t>课后作业：</a:t>
-            </a:r>
-          </a:p>
-          <a:p>
-            <a:r>
-              <a:rPr lang="zh-CN" dirty="0"/>
-              <a:t>· 完成教材 14.3 全部动手练</a:t>
-            </a:r>
-          </a:p>
-          <a:p>
-            <a:r>
-              <a:rPr lang="zh-CN" dirty="0"/>
-              <a:t/>
-            </a:r>
-          </a:p>
-          <a:p>
-            <a:r>
-              <a:rPr lang="zh-CN" dirty="0"/>
-              <a:t>节奏：讲 20 分钟 → 学员自己敲 40 分钟（不看答案）→ 对讲评自查 20 分钟 → 写作业 10 分钟。</a:t>
-            </a:r>
-          </a:p>
-        </p:txBody>
-      </p:sp>
-    </p:spTree>
-  </p:cSld>
-  <p:clrMapOvr>
-    <a:masterClrMapping/>
-  </p:clrMapOvr>
-</p:notes>
-</file>
-
-<file path=ppt/notesSlides/notesSlide5.xml><?xml version="1.0" encoding="utf-8"?>
-<p:notes xmlns:a="http://schemas.openxmlformats.org/drawingml/2006/main" xmlns:p="http://schemas.openxmlformats.org/presentationml/2006/main" xmlns:r="http://schemas.openxmlformats.org/officeDocument/2006/relationships">
-  <p:cSld>
-    <p:spTree>
-      <p:nvGrpSpPr>
-        <p:cNvPr id="1" name=""/>
-        <p:cNvGrpSpPr/>
-        <p:nvPr/>
-      </p:nvGrpSpPr>
-      <p:grpSpPr>
-        <a:xfrm>
-          <a:off x="0" y="0"/>
-          <a:ext cx="0" cy="0"/>
-          <a:chOff x="0" y="0"/>
-          <a:chExt cx="0" cy="0"/>
-        </a:xfrm>
-      </p:grpSpPr>
-      <p:sp>
-        <p:nvSpPr>
-          <p:cNvPr id="2" name="讲课提示"/>
-          <p:cNvSpPr txBox="1"/>
-          <p:nvPr/>
-        </p:nvSpPr>
-        <p:spPr>
-          <a:xfrm>
-            <a:off x="457200" y="457200"/>
-            <a:ext cx="6858000" cy="4800600"/>
-          </a:xfrm>
-          <a:prstGeom prst="rect">
-            <a:avLst/>
-          </a:prstGeom>
-        </p:spPr>
-        <p:txBody>
-          <a:bodyPr wrap="square"/>
-          <a:lstStyle/>
-          <a:p>
-            <a:r>
-              <a:rPr lang="zh-CN" dirty="0"/>
-              <a:t>第 76 节 · 核心知识点：记分牌与数据格式化</a:t>
-            </a:r>
-          </a:p>
-          <a:p>
-            <a:r>
-              <a:rPr lang="zh-CN" dirty="0"/>
-              <a:t/>
-            </a:r>
-          </a:p>
-          <a:p>
-            <a:r>
-              <a:rPr lang="zh-CN" dirty="0"/>
-              <a:t>讲这一页时：先让学生说出上节课的结论，再逐块讲要点。</a:t>
-            </a:r>
-          </a:p>
-          <a:p>
-            <a:r>
-              <a:rPr lang="zh-CN" dirty="0"/>
-              <a:t>每讲完一块，问一句「这一步如果写错了，报错会长什么样？」——把错误提前讲。</a:t>
-            </a:r>
-          </a:p>
-          <a:p>
-            <a:r>
-              <a:rPr lang="zh-CN" dirty="0"/>
-              <a:t/>
-            </a:r>
-          </a:p>
-          <a:p>
-            <a:r>
-              <a:rPr lang="zh-CN" dirty="0"/>
-              <a:t>本节目标：用 prep_* 方法把数据渲染成图像；掌握 round 和千分位格式化</a:t>
-            </a:r>
-          </a:p>
-          <a:p>
-            <a:r>
-              <a:rPr lang="zh-CN" dirty="0"/>
-              <a:t/>
-            </a:r>
-          </a:p>
-          <a:p>
-            <a:r>
-              <a:rPr lang="zh-CN" dirty="0"/>
-              <a:t>看不到懂的地方，回讲义对应小节读一遍，再回来对着这页复述一次——能讲出来才算真懂。</a:t>
-            </a:r>
-          </a:p>
-        </p:txBody>
-      </p:sp>
-      <p:sp>
-        <p:nvSpPr>
-          <p:cNvPr id="2" name="讲课提示"/>
-          <p:cNvSpPr txBox="1"/>
-          <p:nvPr/>
-        </p:nvSpPr>
-        <p:spPr>
-          <a:xfrm>
-            <a:off x="457200" y="457200"/>
-            <a:ext cx="6858000" cy="4800600"/>
-          </a:xfrm>
-          <a:prstGeom prst="rect">
-            <a:avLst/>
-          </a:prstGeom>
-        </p:spPr>
-        <p:txBody>
-          <a:bodyPr wrap="square"/>
-          <a:lstStyle/>
-          <a:p>
-            <a:r>
-              <a:rPr lang="zh-CN" dirty="0"/>
-              <a:t>第 76 节 · 核心知识点：记分牌与数据格式化</a:t>
-            </a:r>
-          </a:p>
-          <a:p>
-            <a:r>
-              <a:rPr lang="zh-CN" dirty="0"/>
-              <a:t/>
-            </a:r>
-          </a:p>
-          <a:p>
-            <a:r>
-              <a:rPr lang="zh-CN" dirty="0"/>
-              <a:t>讲这一页时：先让学生说出上节课的结论，再逐块讲要点。</a:t>
-            </a:r>
-          </a:p>
-          <a:p>
-            <a:r>
-              <a:rPr lang="zh-CN" dirty="0"/>
-              <a:t>每讲完一块，问一句「这一步如果写错了，报错会长什么样？」——把错误提前讲。</a:t>
-            </a:r>
-          </a:p>
-          <a:p>
-            <a:r>
-              <a:rPr lang="zh-CN" dirty="0"/>
-              <a:t/>
-            </a:r>
-          </a:p>
-          <a:p>
-            <a:r>
-              <a:rPr lang="zh-CN" dirty="0"/>
-              <a:t>本节目标：用 prep_* 方法把数据渲染成图像；掌握 round 和千分位格式化</a:t>
-            </a:r>
-          </a:p>
-          <a:p>
-            <a:r>
-              <a:rPr lang="zh-CN" dirty="0"/>
-              <a:t/>
-            </a:r>
-          </a:p>
-          <a:p>
-            <a:r>
-              <a:rPr lang="zh-CN" dirty="0"/>
-              <a:t>看不到懂的地方，回讲义对应小节读一遍，再回来对着这页复述一次——能讲出来才算真懂。</a:t>
-            </a:r>
-          </a:p>
-        </p:txBody>
-      </p:sp>
-    </p:spTree>
-  </p:cSld>
-  <p:clrMapOvr>
-    <a:masterClrMapping/>
-  </p:clrMapOvr>
-</p:notes>
-</file>
-
-<file path=ppt/notesSlides/notesSlide6.xml><?xml version="1.0" encoding="utf-8"?>
-<p:notes xmlns:a="http://schemas.openxmlformats.org/drawingml/2006/main" xmlns:p="http://schemas.openxmlformats.org/presentationml/2006/main" xmlns:r="http://schemas.openxmlformats.org/officeDocument/2006/relationships">
-  <p:cSld>
-    <p:spTree>
-      <p:nvGrpSpPr>
-        <p:cNvPr id="1" name=""/>
-        <p:cNvGrpSpPr/>
-        <p:nvPr/>
-      </p:nvGrpSpPr>
-      <p:grpSpPr>
-        <a:xfrm>
-          <a:off x="0" y="0"/>
-          <a:ext cx="0" cy="0"/>
-          <a:chOff x="0" y="0"/>
-          <a:chExt cx="0" cy="0"/>
-        </a:xfrm>
-      </p:grpSpPr>
-      <p:sp>
-        <p:nvSpPr>
-          <p:cNvPr id="2" name="讲课提示"/>
-          <p:cNvSpPr txBox="1"/>
-          <p:nvPr/>
-        </p:nvSpPr>
-        <p:spPr>
-          <a:xfrm>
-            <a:off x="457200" y="457200"/>
-            <a:ext cx="6858000" cy="4800600"/>
-          </a:xfrm>
-          <a:prstGeom prst="rect">
-            <a:avLst/>
-          </a:prstGeom>
-        </p:spPr>
-        <p:txBody>
-          <a:bodyPr wrap="square"/>
-          <a:lstStyle/>
-          <a:p>
-            <a:r>
-              <a:rPr lang="zh-CN" dirty="0"/>
-              <a:t>第 77 节 · 动态难度与余下飞船数</a:t>
-            </a:r>
-          </a:p>
-          <a:p>
-            <a:r>
-              <a:rPr lang="zh-CN" dirty="0"/>
-              <a:t>单元 14 · Play 按钮与记分 · W17</a:t>
-            </a:r>
-          </a:p>
-          <a:p>
-            <a:r>
-              <a:rPr lang="zh-CN" dirty="0"/>
-              <a:t/>
-            </a:r>
-          </a:p>
-          <a:p>
-            <a:r>
-              <a:rPr lang="zh-CN" dirty="0"/>
-              <a:t>学习目标：理解 speedup_scale / score_scale 与 initialize_dynamic_settings 的配合</a:t>
-            </a:r>
-          </a:p>
-          <a:p>
-            <a:r>
-              <a:rPr lang="zh-CN" dirty="0"/>
-              <a:t/>
-            </a:r>
-          </a:p>
-          <a:p>
-            <a:r>
-              <a:rPr lang="zh-CN" dirty="0"/>
-              <a:t>课堂实操（40 分钟，不看答案）：</a:t>
-            </a:r>
-          </a:p>
-          <a:p>
-            <a:r>
-              <a:rPr lang="zh-CN" dirty="0"/>
-              <a:t>· 实现 increase_speed 并观察难度曲线</a:t>
-            </a:r>
-          </a:p>
-          <a:p>
-            <a:r>
-              <a:rPr lang="zh-CN" dirty="0"/>
-              <a:t>· 用 Group + 小 Ship 图标显示余下命数</a:t>
-            </a:r>
-          </a:p>
-          <a:p>
-            <a:r>
-              <a:rPr lang="zh-CN" dirty="0"/>
-              <a:t/>
-            </a:r>
-          </a:p>
-          <a:p>
-            <a:r>
-              <a:rPr lang="zh-CN" dirty="0"/>
-              <a:t>课后作业：</a:t>
-            </a:r>
-          </a:p>
-          <a:p>
-            <a:r>
-              <a:rPr lang="zh-CN" dirty="0"/>
-              <a:t>· ★ 完成动手项目：最高分做 JSON 持久化</a:t>
-            </a:r>
-          </a:p>
-          <a:p>
-            <a:r>
-              <a:rPr lang="zh-CN" dirty="0"/>
-              <a:t/>
-            </a:r>
-          </a:p>
-          <a:p>
-            <a:r>
-              <a:rPr lang="zh-CN" dirty="0"/>
-              <a:t>节奏：讲 20 分钟 → 学员自己敲 40 分钟（不看答案）→ 对讲评自查 20 分钟 → 写作业 10 分钟。</a:t>
-            </a:r>
-          </a:p>
-        </p:txBody>
-      </p:sp>
-      <p:sp>
-        <p:nvSpPr>
-          <p:cNvPr id="2" name="讲课提示"/>
-          <p:cNvSpPr txBox="1"/>
-          <p:nvPr/>
-        </p:nvSpPr>
-        <p:spPr>
-          <a:xfrm>
-            <a:off x="457200" y="457200"/>
-            <a:ext cx="6858000" cy="4800600"/>
-          </a:xfrm>
-          <a:prstGeom prst="rect">
-            <a:avLst/>
-          </a:prstGeom>
-        </p:spPr>
-        <p:txBody>
-          <a:bodyPr wrap="square"/>
-          <a:lstStyle/>
-          <a:p>
-            <a:r>
-              <a:rPr lang="zh-CN" dirty="0"/>
-              <a:t>第 77 节 · 动态难度与余下飞船数</a:t>
-            </a:r>
-          </a:p>
-          <a:p>
-            <a:r>
-              <a:rPr lang="zh-CN" dirty="0"/>
-              <a:t>单元 14 · Play 按钮与记分 · W17</a:t>
-            </a:r>
-          </a:p>
-          <a:p>
-            <a:r>
-              <a:rPr lang="zh-CN" dirty="0"/>
-              <a:t/>
-            </a:r>
-          </a:p>
-          <a:p>
-            <a:r>
-              <a:rPr lang="zh-CN" dirty="0"/>
-              <a:t>学习目标：理解 speedup_scale / score_scale 与 initialize_dynamic_settings 的配合</a:t>
-            </a:r>
-          </a:p>
-          <a:p>
-            <a:r>
-              <a:rPr lang="zh-CN" dirty="0"/>
-              <a:t/>
-            </a:r>
-          </a:p>
-          <a:p>
-            <a:r>
-              <a:rPr lang="zh-CN" dirty="0"/>
-              <a:t>课堂实操（40 分钟，不看答案）：</a:t>
-            </a:r>
-          </a:p>
-          <a:p>
-            <a:r>
-              <a:rPr lang="zh-CN" dirty="0"/>
-              <a:t>· 实现 increase_speed 并观察难度曲线</a:t>
-            </a:r>
-          </a:p>
-          <a:p>
-            <a:r>
-              <a:rPr lang="zh-CN" dirty="0"/>
-              <a:t>· 用 Group + 小 Ship 图标显示余下命数</a:t>
-            </a:r>
-          </a:p>
-          <a:p>
-            <a:r>
-              <a:rPr lang="zh-CN" dirty="0"/>
-              <a:t/>
-            </a:r>
-          </a:p>
-          <a:p>
-            <a:r>
-              <a:rPr lang="zh-CN" dirty="0"/>
-              <a:t>课后作业：</a:t>
-            </a:r>
-          </a:p>
-          <a:p>
-            <a:r>
-              <a:rPr lang="zh-CN" dirty="0"/>
-              <a:t>· ★ 完成动手项目：最高分做 JSON 持久化</a:t>
-            </a:r>
-          </a:p>
-          <a:p>
-            <a:r>
-              <a:rPr lang="zh-CN" dirty="0"/>
-              <a:t/>
-            </a:r>
-          </a:p>
-          <a:p>
-            <a:r>
-              <a:rPr lang="zh-CN" dirty="0"/>
-              <a:t>节奏：讲 20 分钟 → 学员自己敲 40 分钟（不看答案）→ 对讲评自查 20 分钟 → 写作业 10 分钟。</a:t>
-            </a:r>
-          </a:p>
-        </p:txBody>
-      </p:sp>
-    </p:spTree>
-  </p:cSld>
-  <p:clrMapOvr>
-    <a:masterClrMapping/>
-  </p:clrMapOvr>
-</p:notes>
-</file>
-
-<file path=ppt/notesSlides/notesSlide7.xml><?xml version="1.0" encoding="utf-8"?>
-<p:notes xmlns:a="http://schemas.openxmlformats.org/drawingml/2006/main" xmlns:p="http://schemas.openxmlformats.org/presentationml/2006/main" xmlns:r="http://schemas.openxmlformats.org/officeDocument/2006/relationships">
-  <p:cSld>
-    <p:spTree>
-      <p:nvGrpSpPr>
-        <p:cNvPr id="1" name=""/>
-        <p:cNvGrpSpPr/>
-        <p:nvPr/>
-      </p:nvGrpSpPr>
-      <p:grpSpPr>
-        <a:xfrm>
-          <a:off x="0" y="0"/>
-          <a:ext cx="0" cy="0"/>
-          <a:chOff x="0" y="0"/>
-          <a:chExt cx="0" cy="0"/>
-        </a:xfrm>
-      </p:grpSpPr>
-      <p:sp>
-        <p:nvSpPr>
-          <p:cNvPr id="2" name="讲课提示"/>
-          <p:cNvSpPr txBox="1"/>
-          <p:nvPr/>
-        </p:nvSpPr>
-        <p:spPr>
-          <a:xfrm>
-            <a:off x="457200" y="457200"/>
-            <a:ext cx="6858000" cy="4800600"/>
-          </a:xfrm>
-          <a:prstGeom prst="rect">
-            <a:avLst/>
-          </a:prstGeom>
-        </p:spPr>
-        <p:txBody>
-          <a:bodyPr wrap="square"/>
-          <a:lstStyle/>
-          <a:p>
-            <a:r>
-              <a:rPr lang="zh-CN" dirty="0"/>
-              <a:t>第 77 节 · 核心知识点：动态难度与余下飞船数</a:t>
-            </a:r>
-          </a:p>
-          <a:p>
-            <a:r>
-              <a:rPr lang="zh-CN" dirty="0"/>
-              <a:t/>
-            </a:r>
-          </a:p>
-          <a:p>
-            <a:r>
-              <a:rPr lang="zh-CN" dirty="0"/>
-              <a:t>讲这一页时：先让学生说出上节课的结论，再逐块讲要点。</a:t>
-            </a:r>
-          </a:p>
-          <a:p>
-            <a:r>
-              <a:rPr lang="zh-CN" dirty="0"/>
-              <a:t>每讲完一块，问一句「这一步如果写错了，报错会长什么样？」——把错误提前讲。</a:t>
-            </a:r>
-          </a:p>
-          <a:p>
-            <a:r>
-              <a:rPr lang="zh-CN" dirty="0"/>
-              <a:t/>
-            </a:r>
-          </a:p>
-          <a:p>
-            <a:r>
-              <a:rPr lang="zh-CN" dirty="0"/>
-              <a:t>本节目标：理解 speedup_scale / score_scale 与 initialize_dynamic_settings 的配合</a:t>
-            </a:r>
-          </a:p>
-          <a:p>
-            <a:r>
-              <a:rPr lang="zh-CN" dirty="0"/>
-              <a:t/>
-            </a:r>
-          </a:p>
-          <a:p>
-            <a:r>
-              <a:rPr lang="zh-CN" dirty="0"/>
-              <a:t>看不到懂的地方，回讲义对应小节读一遍，再回来对着这页复述一次——能讲出来才算真懂。</a:t>
-            </a:r>
-          </a:p>
-        </p:txBody>
-      </p:sp>
-      <p:sp>
-        <p:nvSpPr>
-          <p:cNvPr id="2" name="讲课提示"/>
-          <p:cNvSpPr txBox="1"/>
-          <p:nvPr/>
-        </p:nvSpPr>
-        <p:spPr>
-          <a:xfrm>
-            <a:off x="457200" y="457200"/>
-            <a:ext cx="6858000" cy="4800600"/>
-          </a:xfrm>
-          <a:prstGeom prst="rect">
-            <a:avLst/>
-          </a:prstGeom>
-        </p:spPr>
-        <p:txBody>
-          <a:bodyPr wrap="square"/>
-          <a:lstStyle/>
-          <a:p>
-            <a:r>
-              <a:rPr lang="zh-CN" dirty="0"/>
-              <a:t>第 77 节 · 核心知识点：动态难度与余下飞船数</a:t>
-            </a:r>
-          </a:p>
-          <a:p>
-            <a:r>
-              <a:rPr lang="zh-CN" dirty="0"/>
-              <a:t/>
-            </a:r>
-          </a:p>
-          <a:p>
-            <a:r>
-              <a:rPr lang="zh-CN" dirty="0"/>
-              <a:t>讲这一页时：先让学生说出上节课的结论，再逐块讲要点。</a:t>
-            </a:r>
-          </a:p>
-          <a:p>
-            <a:r>
-              <a:rPr lang="zh-CN" dirty="0"/>
-              <a:t>每讲完一块，问一句「这一步如果写错了，报错会长什么样？」——把错误提前讲。</a:t>
-            </a:r>
-          </a:p>
-          <a:p>
-            <a:r>
-              <a:rPr lang="zh-CN" dirty="0"/>
-              <a:t/>
-            </a:r>
-          </a:p>
-          <a:p>
-            <a:r>
-              <a:rPr lang="zh-CN" dirty="0"/>
-              <a:t>本节目标：理解 speedup_scale / score_scale 与 initialize_dynamic_settings 的配合</a:t>
-            </a:r>
-          </a:p>
-          <a:p>
-            <a:r>
-              <a:rPr lang="zh-CN" dirty="0"/>
-              <a:t/>
-            </a:r>
-          </a:p>
-          <a:p>
-            <a:r>
-              <a:rPr lang="zh-CN" dirty="0"/>
-              <a:t>看不到懂的地方，回讲义对应小节读一遍，再回来对着这页复述一次——能讲出来才算真懂。</a:t>
-            </a:r>
-          </a:p>
-        </p:txBody>
-      </p:sp>
-    </p:spTree>
-  </p:cSld>
-  <p:clrMapOvr>
-    <a:masterClrMapping/>
-  </p:clrMapOvr>
-</p:notes>
-</file>
-
-<file path=ppt/notesSlides/notesSlide8.xml><?xml version="1.0" encoding="utf-8"?>
-<p:notes xmlns:a="http://schemas.openxmlformats.org/drawingml/2006/main" xmlns:p="http://schemas.openxmlformats.org/presentationml/2006/main" xmlns:r="http://schemas.openxmlformats.org/officeDocument/2006/relationships">
-  <p:cSld>
-    <p:spTree>
-      <p:nvGrpSpPr>
-        <p:cNvPr id="1" name=""/>
-        <p:cNvGrpSpPr/>
-        <p:nvPr/>
-      </p:nvGrpSpPr>
-      <p:grpSpPr>
-        <a:xfrm>
-          <a:off x="0" y="0"/>
-          <a:ext cx="0" cy="0"/>
-          <a:chOff x="0" y="0"/>
-          <a:chExt cx="0" cy="0"/>
-        </a:xfrm>
-      </p:grpSpPr>
-      <p:sp>
-        <p:nvSpPr>
-          <p:cNvPr id="2" name="讲课提示"/>
-          <p:cNvSpPr txBox="1"/>
-          <p:nvPr/>
-        </p:nvSpPr>
-        <p:spPr>
-          <a:xfrm>
-            <a:off x="457200" y="457200"/>
-            <a:ext cx="6858000" cy="4800600"/>
-          </a:xfrm>
-          <a:prstGeom prst="rect">
-            <a:avLst/>
-          </a:prstGeom>
-        </p:spPr>
-        <p:txBody>
-          <a:bodyPr wrap="square"/>
-          <a:lstStyle/>
-          <a:p>
-            <a:r>
-              <a:rPr lang="zh-CN" dirty="0"/>
-              <a:t>第 78 节 · 实战、答案与自查</a:t>
-            </a:r>
-          </a:p>
-          <a:p>
-            <a:r>
-              <a:rPr lang="zh-CN" dirty="0"/>
-              <a:t>单元 14 · Play 按钮与记分 · W17</a:t>
-            </a:r>
-          </a:p>
-          <a:p>
-            <a:r>
-              <a:rPr lang="zh-CN" dirty="0"/>
-              <a:t/>
-            </a:r>
-          </a:p>
-          <a:p>
-            <a:r>
-              <a:rPr lang="zh-CN" dirty="0"/>
-              <a:t>学习目标：独立完成单元 14 练习，逐条自查常见错误</a:t>
-            </a:r>
-          </a:p>
-          <a:p>
-            <a:r>
-              <a:rPr lang="zh-CN" dirty="0"/>
-              <a:t/>
-            </a:r>
-          </a:p>
-          <a:p>
-            <a:r>
-              <a:rPr lang="zh-CN" dirty="0"/>
-              <a:t>课堂实操（40 分钟，不看答案）：</a:t>
-            </a:r>
-          </a:p>
-          <a:p>
-            <a:r>
-              <a:rPr lang="zh-CN" dirty="0"/>
-              <a:t>· 限时 30 分钟独立完成基础档</a:t>
-            </a:r>
-          </a:p>
-          <a:p>
-            <a:r>
-              <a:rPr lang="zh-CN" dirty="0"/>
-              <a:t>· 逐条演示六、里的每个错误</a:t>
-            </a:r>
-          </a:p>
-          <a:p>
-            <a:r>
-              <a:rPr lang="zh-CN" dirty="0"/>
-              <a:t/>
-            </a:r>
-          </a:p>
-          <a:p>
-            <a:r>
-              <a:rPr lang="zh-CN" dirty="0"/>
-              <a:t>课后作业：</a:t>
-            </a:r>
-          </a:p>
-          <a:p>
-            <a:r>
-              <a:rPr lang="zh-CN" dirty="0"/>
-              <a:t>· ★ 产出：带 Play 按钮与完整记分牌的外星人入侵</a:t>
-            </a:r>
-          </a:p>
-          <a:p>
-            <a:r>
-              <a:rPr lang="zh-CN" dirty="0"/>
-              <a:t/>
-            </a:r>
-          </a:p>
-          <a:p>
-            <a:r>
-              <a:rPr lang="zh-CN" dirty="0"/>
-              <a:t>节奏：讲 20 分钟 → 学员自己敲 40 分钟（不看答案）→ 对讲评自查 20 分钟 → 写作业 10 分钟。</a:t>
-            </a:r>
-          </a:p>
-        </p:txBody>
-      </p:sp>
-      <p:sp>
-        <p:nvSpPr>
-          <p:cNvPr id="2" name="讲课提示"/>
-          <p:cNvSpPr txBox="1"/>
-          <p:nvPr/>
-        </p:nvSpPr>
-        <p:spPr>
-          <a:xfrm>
-            <a:off x="457200" y="457200"/>
-            <a:ext cx="6858000" cy="4800600"/>
-          </a:xfrm>
-          <a:prstGeom prst="rect">
-            <a:avLst/>
-          </a:prstGeom>
-        </p:spPr>
-        <p:txBody>
-          <a:bodyPr wrap="square"/>
-          <a:lstStyle/>
-          <a:p>
-            <a:r>
-              <a:rPr lang="zh-CN" dirty="0"/>
-              <a:t>第 78 节 · 实战、答案与自查</a:t>
-            </a:r>
-          </a:p>
-          <a:p>
-            <a:r>
-              <a:rPr lang="zh-CN" dirty="0"/>
-              <a:t>单元 14 · Play 按钮与记分 · W17</a:t>
-            </a:r>
-          </a:p>
-          <a:p>
-            <a:r>
-              <a:rPr lang="zh-CN" dirty="0"/>
-              <a:t/>
-            </a:r>
-          </a:p>
-          <a:p>
-            <a:r>
-              <a:rPr lang="zh-CN" dirty="0"/>
-              <a:t>学习目标：独立完成单元 14 练习，逐条自查常见错误</a:t>
-            </a:r>
-          </a:p>
-          <a:p>
-            <a:r>
-              <a:rPr lang="zh-CN" dirty="0"/>
-              <a:t/>
-            </a:r>
-          </a:p>
-          <a:p>
-            <a:r>
-              <a:rPr lang="zh-CN" dirty="0"/>
-              <a:t>课堂实操（40 分钟，不看答案）：</a:t>
-            </a:r>
-          </a:p>
-          <a:p>
-            <a:r>
-              <a:rPr lang="zh-CN" dirty="0"/>
-              <a:t>· 限时 30 分钟独立完成基础档</a:t>
-            </a:r>
-          </a:p>
-          <a:p>
-            <a:r>
-              <a:rPr lang="zh-CN" dirty="0"/>
-              <a:t>· 逐条演示六、里的每个错误</a:t>
-            </a:r>
-          </a:p>
-          <a:p>
-            <a:r>
-              <a:rPr lang="zh-CN" dirty="0"/>
-              <a:t/>
-            </a:r>
-          </a:p>
-          <a:p>
-            <a:r>
-              <a:rPr lang="zh-CN" dirty="0"/>
-              <a:t>课后作业：</a:t>
-            </a:r>
-          </a:p>
-          <a:p>
-            <a:r>
-              <a:rPr lang="zh-CN" dirty="0"/>
-              <a:t>· ★ 产出：带 Play 按钮与完整记分牌的外星人入侵</a:t>
-            </a:r>
-          </a:p>
-          <a:p>
-            <a:r>
-              <a:rPr lang="zh-CN" dirty="0"/>
-              <a:t/>
-            </a:r>
-          </a:p>
-          <a:p>
-            <a:r>
-              <a:rPr lang="zh-CN" dirty="0"/>
-              <a:t>节奏：讲 20 分钟 → 学员自己敲 40 分钟（不看答案）→ 对讲评自查 20 分钟 → 写作业 10 分钟。</a:t>
-            </a:r>
-          </a:p>
-        </p:txBody>
-      </p:sp>
-    </p:spTree>
-  </p:cSld>
-  <p:clrMapOvr>
-    <a:masterClrMapping/>
-  </p:clrMapOvr>
-</p:notes>
-</file>
-
-<file path=ppt/notesSlides/notesSlide9.xml><?xml version="1.0" encoding="utf-8"?>
-<p:notes xmlns:a="http://schemas.openxmlformats.org/drawingml/2006/main" xmlns:p="http://schemas.openxmlformats.org/presentationml/2006/main" xmlns:r="http://schemas.openxmlformats.org/officeDocument/2006/relationships">
-  <p:cSld>
-    <p:spTree>
-      <p:nvGrpSpPr>
-        <p:cNvPr id="1" name=""/>
-        <p:cNvGrpSpPr/>
-        <p:nvPr/>
-      </p:nvGrpSpPr>
-      <p:grpSpPr>
-        <a:xfrm>
-          <a:off x="0" y="0"/>
-          <a:ext cx="0" cy="0"/>
-          <a:chOff x="0" y="0"/>
-          <a:chExt cx="0" cy="0"/>
-        </a:xfrm>
-      </p:grpSpPr>
-      <p:sp>
-        <p:nvSpPr>
-          <p:cNvPr id="2" name="讲课提示"/>
-          <p:cNvSpPr txBox="1"/>
-          <p:nvPr/>
-        </p:nvSpPr>
-        <p:spPr>
-          <a:xfrm>
-            <a:off x="457200" y="457200"/>
-            <a:ext cx="6858000" cy="4800600"/>
-          </a:xfrm>
-          <a:prstGeom prst="rect">
-            <a:avLst/>
-          </a:prstGeom>
-        </p:spPr>
-        <p:txBody>
-          <a:bodyPr wrap="square"/>
-          <a:lstStyle/>
-          <a:p>
-            <a:r>
-              <a:rPr lang="zh-CN" dirty="0"/>
-              <a:t>第 78 节 · 核心知识点：实战、答案与自查</a:t>
-            </a:r>
-          </a:p>
-          <a:p>
-            <a:r>
-              <a:rPr lang="zh-CN" dirty="0"/>
-              <a:t/>
-            </a:r>
-          </a:p>
-          <a:p>
-            <a:r>
-              <a:rPr lang="zh-CN" dirty="0"/>
-              <a:t>讲这一页时：先让学生说出上节课的结论，再逐块讲要点。</a:t>
-            </a:r>
-          </a:p>
-          <a:p>
-            <a:r>
-              <a:rPr lang="zh-CN" dirty="0"/>
-              <a:t>每讲完一块，问一句「这一步如果写错了，报错会长什么样？」——把错误提前讲。</a:t>
-            </a:r>
-          </a:p>
-          <a:p>
-            <a:r>
-              <a:rPr lang="zh-CN" dirty="0"/>
-              <a:t/>
-            </a:r>
-          </a:p>
-          <a:p>
-            <a:r>
-              <a:rPr lang="zh-CN" dirty="0"/>
-              <a:t>本节目标：独立完成单元 14 练习，逐条自查常见错误</a:t>
-            </a:r>
-          </a:p>
-          <a:p>
-            <a:r>
-              <a:rPr lang="zh-CN" dirty="0"/>
-              <a:t/>
-            </a:r>
-          </a:p>
-          <a:p>
-            <a:r>
-              <a:rPr lang="zh-CN" dirty="0"/>
-              <a:t>看不到懂的地方，回讲义对应小节读一遍，再回来对着这页复述一次——能讲出来才算真懂。</a:t>
-            </a:r>
-          </a:p>
-        </p:txBody>
-      </p:sp>
-      <p:sp>
-        <p:nvSpPr>
-          <p:cNvPr id="2" name="讲课提示"/>
-          <p:cNvSpPr txBox="1"/>
-          <p:nvPr/>
-        </p:nvSpPr>
-        <p:spPr>
-          <a:xfrm>
-            <a:off x="457200" y="457200"/>
-            <a:ext cx="6858000" cy="4800600"/>
-          </a:xfrm>
-          <a:prstGeom prst="rect">
-            <a:avLst/>
-          </a:prstGeom>
-        </p:spPr>
-        <p:txBody>
-          <a:bodyPr wrap="square"/>
-          <a:lstStyle/>
-          <a:p>
-            <a:r>
-              <a:rPr lang="zh-CN" dirty="0"/>
-              <a:t>第 78 节 · 核心知识点：实战、答案与自查</a:t>
-            </a:r>
-          </a:p>
-          <a:p>
-            <a:r>
-              <a:rPr lang="zh-CN" dirty="0"/>
-              <a:t/>
-            </a:r>
-          </a:p>
-          <a:p>
-            <a:r>
-              <a:rPr lang="zh-CN" dirty="0"/>
-              <a:t>讲这一页时：先让学生说出上节课的结论，再逐块讲要点。</a:t>
-            </a:r>
-          </a:p>
-          <a:p>
-            <a:r>
-              <a:rPr lang="zh-CN" dirty="0"/>
-              <a:t>每讲完一块，问一句「这一步如果写错了，报错会长什么样？」——把错误提前讲。</a:t>
-            </a:r>
-          </a:p>
-          <a:p>
-            <a:r>
-              <a:rPr lang="zh-CN" dirty="0"/>
-              <a:t/>
-            </a:r>
-          </a:p>
-          <a:p>
-            <a:r>
-              <a:rPr lang="zh-CN" dirty="0"/>
-              <a:t>本节目标：独立完成单元 14 练习，逐条自查常见错误</a:t>
-            </a:r>
-          </a:p>
-          <a:p>
-            <a:r>
-              <a:rPr lang="zh-CN" dirty="0"/>
-              <a:t/>
-            </a:r>
-          </a:p>
-          <a:p>
-            <a:r>
-              <a:rPr lang="zh-CN" dirty="0"/>
-              <a:t>看不到懂的地方，回讲义对应小节读一遍，再回来对着这页复述一次——能讲出来才算真懂。</a:t>
-            </a:r>
-          </a:p>
-        </p:txBody>
-      </p:sp>
-    </p:spTree>
-  </p:cSld>
-  <p:clrMapOvr>
-    <a:masterClrMapping/>
-  </p:clrMapOvr>
-</p:notes>
-</file>
-
 <file path=ppt/slideLayouts/slideLayout1.xml><?xml version="1.0" encoding="utf-8"?>
 <p:sldLayout xmlns:p="http://schemas.openxmlformats.org/presentationml/2006/main" xmlns:a="http://schemas.openxmlformats.org/drawingml/2006/main">
   <p:cSld name="DEFAULT">
@@ -2379,7 +553,7 @@
   <p:cSld>
     <p:spTree>
       <p:nvGrpSpPr>
-        <p:cNvPr id="1" name="" descr="&lt;Slide style={{ width: '1280px', height: '720px', backgroundColor: '#FAFCFE', padding: 0, position: 'relative', overflow: 'hidden' }}&gt;&#13;&#10;    &lt;Box style={{ position: 'absolute', left: 0, top: 0, width: '1280px', height: '150px', background: '#1F5FA8' }} /&gt;&#13;&#10;    &lt;Box style={{ position: 'absolute', left: 64, top: 34, width: '1152px', flexDirection: 'column' }}&gt;&#13;&#10;        &lt;Text style={{ fontSize: 15, fontWeight: 'bold', color: '#BFD9F2', letterSpacing: 2 }}&gt;阶段 2 · 单元 14&lt;/Text&gt;&#13;&#10;        &lt;Text style={{ fontSize: 38, fontWeight: 'bold', color: '#FFFFFF', marginTop: 6 }}&gt;Play 按钮与记分&lt;/Text&gt;&#13;&#10;    &lt;/Box&gt;&#13;&#10;    &lt;Box style={{ position: 'absolute', left: 64, top: 168, width: '1152px', height: 470 }}&gt;&#13;&#10;        &lt;svg width='1152' height='470' viewBox='0 0 1152 470'&gt;&#13;&#10;            &lt;text x='0' y='18' fontSize='15' fontWeight='bold' fill='#16232E' fontFamily='Microsoft YaHei'&gt;本单元共 4 节课&lt;/text&gt;&#13;&#10;            &lt;rect x='0' y='196' width='1152' height='38' rx='7' fill='#FFFFFF' /&gt;&lt;text x='16' y='221' fontSize='15' fontWeight='bold' fill='#1F5FA8' fontFamily='Microsoft YaHei'&gt;第 75 节&lt;/text&gt;&lt;text x='96' y='221' fontSize='15' fill='#16232E' fontFamily='Microsoft YaHei'&gt;游戏状态机与 Button 类&lt;/text&gt;&lt;text x='1080' y='221' fontSize='13' fill='#5A6B7A' textAnchor='end' fontFamily='Microsoft YaHei'&gt;W16–W17&lt;/text&gt;&lt;rect x='0' y='238' width='1152' height='38' rx='7' fill='#F2F7FD' /&gt;&lt;text x='16' y='263' fontSize='15' fontWeight='bold' fill='#1F5FA8' fontFamily='Microsoft YaHei'&gt;第 76 节&lt;/text&gt;&lt;text x='96' y='263' fontSize='15' fill='#16232E' fontFamily='Microsoft YaHei'&gt;记分牌与数据格式化&lt;/text&gt;&lt;text x='1080' y='263' fontSize='13' fill='#5A6B7A' textAnchor='end' fontFamily='Microsoft YaHei'&gt;W16–W17&lt;/text&gt;&lt;rect x='0' y='280' width='1152' height='38' rx='7' fill='#FFFFFF' /&gt;&lt;text x='16' y='305' fontSize='15' fontWeight='bold' fill='#1F5FA8' fontFamily='Microsoft YaHei'&gt;第 77 节&lt;/text&gt;&lt;text x='96' y='305' fontSize='15' fill='#16232E' fontFamily='Microsoft YaHei'&gt;动态难度与余下飞船数&lt;/text&gt;&lt;text x='1080' y='305' fontSize='13' fill='#5A6B7A' textAnchor='end' fontFamily='Microsoft YaHei'&gt;W16–W17&lt;/text&gt;&lt;rect x='0' y='322' width='1152' height='38' rx='7' fill='#F2F7FD' /&gt;&lt;text x='16' y='347' fontSize='15' fontWeight='bold' fill='#1F5FA8' fontFamily='Microsoft YaHei'&gt;第 78 节&lt;/text&gt;&lt;text x='96' y='347' fontSize='15' fill='#16232E' fontFamily='Microsoft YaHei'&gt;实战、答案与自查&lt;/text&gt;&lt;text x='1080' y='347' fontSize='13' fill='#5A6B7A' textAnchor='end' fontFamily='Microsoft YaHei'&gt;W16–W17&lt;/text&gt;&#13;&#10;        &lt;/svg&gt;&#13;&#10;    &lt;/Box&gt;&#13;&#10;    &lt;Box style={{ position: 'absolute', left: 64, bottom: 22, width: '1152px', flexDirection: 'row', justifyContent: 'space-between' }}&gt;&#13;&#10;        &lt;Text style={{ fontSize: 13, color: '#8A9AAA' }}&gt;Python 讲授课件 · 逐节版&lt;/Text&gt;&#13;&#10;        &lt;Text style={{ fontSize: 13, color: '#8A9AAA' }}&gt;单元 14 · 封面&lt;/Text&gt;&#13;&#10;    &lt;/Box&gt;&#13;&#10;&lt;/Slide&gt;&#13;&#10;"/>
+        <p:cNvPr id="1" name="" descr="&lt;Slide style={{ width: '1280px', height: '720px', backgroundColor: '#FAFCFE', padding: 0, position: 'relative', overflow: 'hidden' }}&gt;&#13;&#10;    &lt;Box style={{ position: 'absolute', left: 0, top: 0, width: '1280px', height: '150px', background: '#1F5FA8' }} /&gt;&#13;&#10;    &lt;Box style={{ position: 'absolute', left: 64, top: 34, width: '1152px', flexDirection: 'column' }}&gt;&#13;&#10;        &lt;Text style={{ fontSize: 15, fontWeight: 'bold', color: '#BFD9F2', letterSpacing: 2 }}&gt;阶段 2 · 单元 14&lt;/Text&gt;&#13;&#10;        &lt;Text style={{ fontSize: 38, fontWeight: 'bold', color: '#FFFFFF', marginTop: 6 }}&gt;Play 按钮与记分&lt;/Text&gt;&#13;&#10;    &lt;/Box&gt;&#13;&#10;    &lt;Box style={{ position: 'absolute', left: 64, top: 168, width: '1152px', height: 470 }}&gt;&#13;&#10;        &lt;svg width='1152' height='470' viewBox='0 0 1152 470'&gt;&#13;&#10;            &lt;text x='0' y='18' fontSize='15' fontWeight='bold' fill='#16232E' fontFamily='Microsoft YaHei'&gt;本单元共 4 节课&lt;/text&gt;&#13;&#10;            &lt;rect x='0' y='56.0' width='1152' height='48.0' rx='7' fill='#FFFFFF' /&gt;&lt;text x='16' y='85.0' fontSize='15' fontWeight='bold' fill='#1F5FA8' fontFamily='Microsoft YaHei'&gt;第 75 节&lt;/text&gt;&lt;text x='96' y='85.0' fontSize='15' fill='#16232E' fontFamily='Microsoft YaHei'&gt;游戏状态机与 Button 类&lt;/text&gt;&lt;text x='1080' y='85.0' fontSize='13' fill='#5A6B7A' textAnchor='end' fontFamily='Microsoft YaHei'&gt;W16–W17&lt;/text&gt;&lt;rect x='0' y='155.0' width='1152' height='48.0' rx='7' fill='#F2F7FD' /&gt;&lt;text x='16' y='184.0' fontSize='15' fontWeight='bold' fill='#1F5FA8' fontFamily='Microsoft YaHei'&gt;第 76 节&lt;/text&gt;&lt;text x='96' y='184.0' fontSize='15' fill='#16232E' fontFamily='Microsoft YaHei'&gt;记分牌与数据格式化&lt;/text&gt;&lt;text x='1080' y='184.0' fontSize='13' fill='#5A6B7A' textAnchor='end' fontFamily='Microsoft YaHei'&gt;W16–W17&lt;/text&gt;&lt;rect x='0' y='254.0' width='1152' height='48.0' rx='7' fill='#FFFFFF' /&gt;&lt;text x='16' y='283.0' fontSize='15' fontWeight='bold' fill='#1F5FA8' fontFamily='Microsoft YaHei'&gt;第 77 节&lt;/text&gt;&lt;text x='96' y='283.0' fontSize='15' fill='#16232E' fontFamily='Microsoft YaHei'&gt;动态难度与余下飞船数&lt;/text&gt;&lt;text x='1080' y='283.0' fontSize='13' fill='#5A6B7A' textAnchor='end' fontFamily='Microsoft YaHei'&gt;W16–W17&lt;/text&gt;&lt;rect x='0' y='353.0' width='1152' height='48.0' rx='7' fill='#F2F7FD' /&gt;&lt;text x='16' y='382.0' fontSize='15' fontWeight='bold' fill='#1F5FA8' fontFamily='Microsoft YaHei'&gt;第 78 节&lt;/text&gt;&lt;text x='96' y='382.0' fontSize='15' fill='#16232E' fontFamily='Microsoft YaHei'&gt;实战、答案与自查&lt;/text&gt;&lt;text x='1080' y='382.0' fontSize='13' fill='#5A6B7A' textAnchor='end' fontFamily='Microsoft YaHei'&gt;W16–W17&lt;/text&gt;&#13;&#10;        &lt;/svg&gt;&#13;&#10;    &lt;/Box&gt;&#13;&#10;    &lt;Box style={{ position: 'absolute', left: 64, bottom: 22, width: '1152px', flexDirection: 'row', justifyContent: 'space-between' }}&gt;&#13;&#10;        &lt;Text style={{ fontSize: 13, color: '#8A9AAA' }}&gt;Python 讲授课件 · 逐节版&lt;/Text&gt;&#13;&#10;        &lt;Text style={{ fontSize: 13, color: '#8A9AAA' }}&gt;单元 14 · 封面&lt;/Text&gt;&#13;&#10;    &lt;/Box&gt;&#13;&#10;&lt;/Slide&gt;&#13;&#10;"/>
         <p:cNvGrpSpPr/>
         <p:nvPr/>
       </p:nvGrpSpPr>
@@ -3523,7 +1697,7 @@
   <p:cSld>
     <p:spTree>
       <p:nvGrpSpPr>
-        <p:cNvPr id="29" name="" descr="&lt;Slide style={{ width: '1280px', height: '720px', backgroundColor: '#FAFCFE', padding: 0, position: 'relative', overflow: 'hidden' }}&gt;&#13;&#10;    &lt;Box style={{ position: 'absolute', left: 64, top: 36, width: '1152px', flexDirection: 'row', alignItems: 'center', gap: 12 }}&gt;&#13;&#10;        &lt;Box style={{ background: '#0E9B78', borderRadius: 5, padding: '3px 11px' }}&gt;&#13;&#10;            &lt;Text style={{ fontSize: 14, fontWeight: 'bold', color: '#FFFFFF' }}&gt;第 75 节&lt;/Text&gt;&#13;&#10;        &lt;/Box&gt;&#13;&#10;        &lt;Text style={{ fontSize: 30, fontWeight: 'bold', color: '#16232E' }}&gt;核心知识点&lt;/Text&gt;&#13;&#10;        &lt;Text style={{ fontSize: 15, color: '#5A6B7A', marginTop: 10 }}&gt;· 游戏状态机与 Button 类&lt;/Text&gt;&#13;&#10;    &lt;/Box&gt;&#13;&#10;    &lt;Box style={{ position: 'absolute', left: 0, top: 0, width: '1280px', height: '720px' }}&gt;&#13;&#10;        &lt;svg width='1280' height='720' viewBox='0 0 1280 720'&gt;&#13;&#10;            &lt;rect x='64' y='96' width='548' height='330' rx='12' fill='#FFFFFF' stroke='#D8E3EE' /&gt;&lt;rect x='64' y='96' width='548' height='4' rx='2' fill='#1F5FA8' /&gt;&lt;text x='82' y='130' fontSize='15.5' fontWeight='bold' fill='#1F5FA8' textAnchor='start' fontFamily='Microsoft YaHei'&gt;2.1 游戏状态机：从「一启动就玩」到「有开始界面」&lt;/text&gt;&lt;text x='82' y='169.0' fontSize='13' fill='#3A4A58' textAnchor='start' fontFamily='Microsoft YaHei'&gt;· inactive：刚启动或上一局结束，屏幕上只有 Play 按钮，飞船不动、外星人不生成。&lt;/text&gt;&lt;text x='82' y='197.5' fontSize='13' fill='#3A4A58' textAnchor='start' fontFamily='Microsoft YaHei'&gt;· active：点过 Play，一切正常运转。&lt;/text&gt;&lt;text x='82' y='226.0' fontSize='13' fill='#3A4A58' textAnchor='start' fontFamily='Microsoft YaHei'&gt;· 教材没有单独的 game_over 变量——「game over」就是「active 又变回 inac…&lt;/text&gt;&lt;rect x='668' y='96' width='548' height='330' rx='12' fill='#FFFFFF' stroke='#D8E3EE' /&gt;&lt;rect x='668' y='96' width='548' height='4' rx='2' fill='#1F5FA8' /&gt;&lt;text x='686' y='130' fontSize='15.5' fontWeight='bold' fill='#1F5FA8' textAnchor='start' fontFamily='Microsoft YaHei'&gt;2.2 Button 类：Pygame 的文字不是「画」出…&lt;/text&gt;&lt;text x='686' y='169.0' fontSize='13' fill='#3A4A58' textAnchor='start' fontFamily='Microsoft YaHei'&gt;· 按钮为什么要自己持有 screen 和 screen_rect？ 因为它要自己画自己（draw_but…&lt;/text&gt;&lt;text x='686' y='197.5' fontSize='13' fill='#3A4A58' textAnchor='start' fontFamily='Microsoft YaHei'&gt;· _prep_msg() 只在构造时调用一次：文字不变，每帧重渲染纯属浪费。&lt;/text&gt;&lt;text x='686' y='226.0' fontSize='13' fill='#3A4A58' textAnchor='start' fontFamily='Microsoft YaHei'&gt;· render() 的 True 是抗锯齿，写 False 就是马赛克字；参数顺序是「文字、抗锯齿&lt;/text&gt;&lt;text x='686' y='245.5' fontSize='13' fill='#3A4A58' textAnchor='start' fontFamily='Microsoft YaHei'&gt;、前景…&lt;/text&gt;&lt;rect x='64' y='574' width='1152' height='66' rx='12' fill='#EEF5FB' /&gt;&lt;text x='84' y='616' fontSize='14' fill='#243444' textAnchor='start' fontFamily='Microsoft YaHei'&gt;看不懂的地方先回讲义对应小节读一遍，再回来对着这页复述一次——能讲出来才算真懂。&lt;/text&gt;&#13;&#10;            &lt;text x='64' y='684' fontSize='13' fill='#8A9AAA' fontFamily='Microsoft YaHei'&gt;Python 讲授课件 · 逐节版&lt;/text&gt;&#13;&#10;            &lt;text x='1216' y='684' fontSize='13' fill='#8A9AAA' textAnchor='end' fontFamily='Microsoft YaHei'&gt;单元 14 · 第 75 节&lt;/text&gt;&#13;&#10;        &lt;/svg&gt;&#13;&#10;    &lt;/Box&gt;&#13;&#10;&lt;/Slide&gt;&#13;&#10;"/>
+        <p:cNvPr id="29" name="" descr="&lt;Slide style={{ width: '1280px', height: '720px', backgroundColor: '#FAFCFE', padding: 0, position: 'relative', overflow: 'hidden' }}&gt;&#13;&#10;    &lt;Box style={{ position: 'absolute', left: 64, top: 36, width: '1152px', flexDirection: 'row', alignItems: 'center', gap: 12 }}&gt;&#13;&#10;        &lt;Box style={{ background: '#0E9B78', borderRadius: 5, padding: '3px 11px' }}&gt;&#13;&#10;            &lt;Text style={{ fontSize: 14, fontWeight: 'bold', color: '#FFFFFF' }}&gt;第 75 节&lt;/Text&gt;&#13;&#10;        &lt;/Box&gt;&#13;&#10;        &lt;Text style={{ fontSize: 30, fontWeight: 'bold', color: '#16232E' }}&gt;核心知识点&lt;/Text&gt;&#13;&#10;        &lt;Text style={{ fontSize: 15, color: '#5A6B7A', marginTop: 10 }}&gt;· 游戏状态机与 Button 类&lt;/Text&gt;&#13;&#10;    &lt;/Box&gt;&#13;&#10;    &lt;Box style={{ position: 'absolute', left: 0, top: 0, width: '1280px', height: '720px' }}&gt;&#13;&#10;        &lt;svg width='1280' height='720' viewBox='0 0 1280 720'&gt;&#13;&#10;            &lt;rect x='64' y='96' width='548' height='330' rx='12' fill='#FFFFFF' stroke='#D8E3EE' /&gt;&lt;rect x='64' y='96' width='548' height='4' rx='2' fill='#1F5FA8' /&gt;&lt;text x='82' y='130' fontSize='15.5' fontWeight='bold' fill='#1F5FA8' textAnchor='start' fontFamily='Microsoft YaHei'&gt;2.1 游戏状态机：从「一启动就玩」到「有开始界面」&lt;/text&gt;&lt;text x='82' y='169.0' fontSize='13' fill='#3A4A58' textAnchor='start' fontFamily='Microsoft YaHei'&gt;· inactive：刚启动或上一局结束，屏幕上只有 Play 按钮，飞船不动、外星人不生成。&lt;/text&gt;&lt;text x='82' y='197.5' fontSize='13' fill='#3A4A58' textAnchor='start' fontFamily='Microsoft YaHei'&gt;· active：点过 Play，一切正常运转。&lt;/text&gt;&lt;text x='82' y='226.0' fontSize='13' fill='#3A4A58' textAnchor='start' fontFamily='Microsoft YaHei'&gt;· 教材没有单独的 game_over 变量——「game over」就是「active 又变回 inac…&lt;/text&gt;&lt;rect x='668' y='96' width='548' height='330' rx='12' fill='#FFFFFF' stroke='#D8E3EE' /&gt;&lt;rect x='668' y='96' width='548' height='4' rx='2' fill='#1F5FA8' /&gt;&lt;text x='686' y='130' fontSize='15.5' fontWeight='bold' fill='#1F5FA8' textAnchor='start' fontFamily='Microsoft YaHei'&gt;2.2 Button 类：Pygame 的文字不是「画」出…&lt;/text&gt;&lt;text x='686' y='169.0' fontSize='13' fill='#3A4A58' textAnchor='start' fontFamily='Microsoft YaHei'&gt;· 按钮为什么要自己持有 screen 和 screen_rect？ 因为它要自己画自己（draw_but…&lt;/text&gt;&lt;text x='686' y='197.5' fontSize='13' fill='#3A4A58' textAnchor='start' fontFamily='Microsoft YaHei'&gt;· _prep_msg() 只在构造时调用一次：文字不变，每帧重渲染纯属浪费。&lt;/text&gt;&lt;text x='686' y='226.0' fontSize='13' fill='#3A4A58' textAnchor='start' fontFamily='Microsoft YaHei'&gt;· render() 的 True 是抗锯齿，写 False 就是马赛克字；参数顺序是「文字、&lt;/text&gt;&lt;text x='686' y='245.5' fontSize='13' fill='#3A4A58' textAnchor='start' fontFamily='Microsoft YaHei'&gt;抗锯齿…&lt;/text&gt;&lt;rect x='64' y='574' width='1152' height='66' rx='12' fill='#EEF5FB' /&gt;&lt;text x='84' y='616' fontSize='14' fill='#243444' textAnchor='start' fontFamily='Microsoft YaHei'&gt;看不懂的地方先回讲义对应小节读一遍，再回来对着这页复述一次——能讲出来才算真懂。&lt;/text&gt;&#13;&#10;            &lt;text x='64' y='684' fontSize='13' fill='#8A9AAA' fontFamily='Microsoft YaHei'&gt;Python 讲授课件 · 逐节版&lt;/text&gt;&#13;&#10;            &lt;text x='1216' y='684' fontSize='13' fill='#8A9AAA' textAnchor='end' fontFamily='Microsoft YaHei'&gt;单元 14 · 第 75 节&lt;/text&gt;&#13;&#10;        &lt;/svg&gt;&#13;&#10;    &lt;/Box&gt;&#13;&#10;&lt;/Slide&gt;&#13;&#10;"/>
         <p:cNvGrpSpPr/>
         <p:nvPr/>
       </p:nvGrpSpPr>
@@ -3974,7 +2148,7 @@
   <p:cSld>
     <p:spTree>
       <p:nvGrpSpPr>
-        <p:cNvPr id="42" name="" descr="&lt;Slide style={{ width: '1280px', height: '720px', backgroundColor: '#FAFCFE', padding: 0, position: 'relative', overflow: 'hidden' }}&gt;&#13;&#10;    &lt;Box style={{ position: 'absolute', left: 64, top: 36, width: '1152px', flexDirection: 'row', alignItems: 'center', gap: 12 }}&gt;&#13;&#10;        &lt;Box style={{ background: '#0E9B78', borderRadius: 5, padding: '3px 11px' }}&gt;&#13;&#10;            &lt;Text style={{ fontSize: 14, fontWeight: 'bold', color: '#FFFFFF' }}&gt;第 76 节&lt;/Text&gt;&#13;&#10;        &lt;/Box&gt;&#13;&#10;        &lt;Text style={{ fontSize: 30, fontWeight: 'bold', color: '#16232E' }}&gt;核心知识点&lt;/Text&gt;&#13;&#10;        &lt;Text style={{ fontSize: 15, color: '#5A6B7A', marginTop: 10 }}&gt;· 记分牌与数据格式化&lt;/Text&gt;&#13;&#10;    &lt;/Box&gt;&#13;&#10;    &lt;Box style={{ position: 'absolute', left: 0, top: 0, width: '1280px', height: '720px' }}&gt;&#13;&#10;        &lt;svg width='1280' height='720' viewBox='0 0 1280 720'&gt;&#13;&#10;            &lt;rect x='64' y='96' width='548' height='330' rx='12' fill='#FFFFFF' stroke='#D8E3EE' /&gt;&lt;rect x='64' y='96' width='548' height='4' rx='2' fill='#1F5FA8' /&gt;&lt;text x='82' y='130' fontSize='15.5' fontWeight='bold' fill='#1F5FA8' textAnchor='start' fontFamily='Microsoft YaHei'&gt;2.3 点下 Play 之后：开始、重置、非活动与隐藏光标&lt;/text&gt;&lt;text x='82' y='169.0' fontSize='13' fill='#3A4A58' textAnchor='start' fontFamily='Microsoft YaHei'&gt;· 「将 Play 按钮切换到非活动状态」：游戏开始后按钮不该还能点。教材不删按钮，只&lt;/text&gt;&lt;text x='82' y='188.5' fontSize='13' fill='#3A4A58' textAnchor='start' fontFamily='Microsoft YaHei'&gt;在判断时加一个条件—…&lt;/text&gt;&lt;text x='82' y='217.0' fontSize='13' fill='#3A4A58' textAnchor='start' fontFamily='Microsoft YaHei'&gt;· 「隐藏光标」必须成对：游戏中 set_visible(False)，结束时 set_visible(T…&lt;/text&gt;&lt;rect x='668' y='96' width='548' height='330' rx='12' fill='#FFFFFF' stroke='#D8E3EE' /&gt;&lt;rect x='668' y='96' width='548' height='4' rx='2' fill='#1F5FA8' /&gt;&lt;text x='686' y='130' fontSize='15.5' fontWeight='bold' fill='#1F5FA8' textAnchor='start' fontFamily='Microsoft YaHei'&gt;2.4 记分牌：数据与显示分离、格式化与最高分&lt;/text&gt;&lt;text x='686' y='169.0' fontSize='13' fill='#3A4A58' textAnchor='start' fontFamily='Microsoft YaHei'&gt;· 格式化两招：round(1234567, -1) 舍入到十位得 1234570；&quot;｛:,｝&quot;.form…&lt;/text&gt;&lt;text x='686' y='197.5' fontSize='13' fill='#3A4A58' textAnchor='start' fontFamily='Microsoft YaHei'&gt;· 最高分为什么不能在重置时清零，这是本章的重点思想：&lt;/text&gt;&lt;rect x='64' y='574' width='1152' height='66' rx='12' fill='#EEF5FB' /&gt;&lt;text x='84' y='616' fontSize='14' fill='#243444' textAnchor='start' fontFamily='Microsoft YaHei'&gt;看不懂的地方先回讲义对应小节读一遍，再回来对着这页复述一次——能讲出来才算真懂。&lt;/text&gt;&#13;&#10;            &lt;text x='64' y='684' fontSize='13' fill='#8A9AAA' fontFamily='Microsoft YaHei'&gt;Python 讲授课件 · 逐节版&lt;/text&gt;&#13;&#10;            &lt;text x='1216' y='684' fontSize='13' fill='#8A9AAA' textAnchor='end' fontFamily='Microsoft YaHei'&gt;单元 14 · 第 76 节&lt;/text&gt;&#13;&#10;        &lt;/svg&gt;&#13;&#10;    &lt;/Box&gt;&#13;&#10;&lt;/Slide&gt;&#13;&#10;"/>
+        <p:cNvPr id="42" name="" descr="&lt;Slide style={{ width: '1280px', height: '720px', backgroundColor: '#FAFCFE', padding: 0, position: 'relative', overflow: 'hidden' }}&gt;&#13;&#10;    &lt;Box style={{ position: 'absolute', left: 64, top: 36, width: '1152px', flexDirection: 'row', alignItems: 'center', gap: 12 }}&gt;&#13;&#10;        &lt;Box style={{ background: '#0E9B78', borderRadius: 5, padding: '3px 11px' }}&gt;&#13;&#10;            &lt;Text style={{ fontSize: 14, fontWeight: 'bold', color: '#FFFFFF' }}&gt;第 76 节&lt;/Text&gt;&#13;&#10;        &lt;/Box&gt;&#13;&#10;        &lt;Text style={{ fontSize: 30, fontWeight: 'bold', color: '#16232E' }}&gt;核心知识点&lt;/Text&gt;&#13;&#10;        &lt;Text style={{ fontSize: 15, color: '#5A6B7A', marginTop: 10 }}&gt;· 记分牌与数据格式化&lt;/Text&gt;&#13;&#10;    &lt;/Box&gt;&#13;&#10;    &lt;Box style={{ position: 'absolute', left: 0, top: 0, width: '1280px', height: '720px' }}&gt;&#13;&#10;        &lt;svg width='1280' height='720' viewBox='0 0 1280 720'&gt;&#13;&#10;            &lt;rect x='64' y='96' width='548' height='330' rx='12' fill='#FFFFFF' stroke='#D8E3EE' /&gt;&lt;rect x='64' y='96' width='548' height='4' rx='2' fill='#1F5FA8' /&gt;&lt;text x='82' y='130' fontSize='15.5' fontWeight='bold' fill='#1F5FA8' textAnchor='start' fontFamily='Microsoft YaHei'&gt;2.3 点下 Play 之后：开始、重置、非活动与隐藏光标&lt;/text&gt;&lt;text x='82' y='169.0' fontSize='13' fill='#3A4A58' textAnchor='start' fontFamily='Microsoft YaHei'&gt;· 「将 Play 按钮切换到非活动状态」&lt;/text&gt;&lt;text x='82' y='197.5' fontSize='13' fill='#3A4A58' textAnchor='start' fontFamily='Microsoft YaHei'&gt;· 「隐藏光标」必须成对&lt;/text&gt;&lt;rect x='668' y='96' width='548' height='330' rx='12' fill='#FFFFFF' stroke='#D8E3EE' /&gt;&lt;rect x='668' y='96' width='548' height='4' rx='2' fill='#1F5FA8' /&gt;&lt;text x='686' y='130' fontSize='15.5' fontWeight='bold' fill='#1F5FA8' textAnchor='start' fontFamily='Microsoft YaHei'&gt;2.4 记分牌：数据与显示分离、格式化与最高分&lt;/text&gt;&lt;text x='686' y='169.0' fontSize='13' fill='#3A4A58' textAnchor='start' fontFamily='Microsoft YaHei'&gt;· 格式化两招&lt;/text&gt;&lt;text x='686' y='197.5' fontSize='13' fill='#3A4A58' textAnchor='start' fontFamily='Microsoft YaHei'&gt;· 最高分为什么不能在重置时清零&lt;/text&gt;&lt;rect x='64' y='574' width='1152' height='66' rx='12' fill='#EEF5FB' /&gt;&lt;text x='84' y='616' fontSize='14' fill='#243444' textAnchor='start' fontFamily='Microsoft YaHei'&gt;看不懂的地方先回讲义对应小节读一遍，再回来对着这页复述一次——能讲出来才算真懂。&lt;/text&gt;&#13;&#10;            &lt;text x='64' y='684' fontSize='13' fill='#8A9AAA' fontFamily='Microsoft YaHei'&gt;Python 讲授课件 · 逐节版&lt;/text&gt;&#13;&#10;            &lt;text x='1216' y='684' fontSize='13' fill='#8A9AAA' textAnchor='end' fontFamily='Microsoft YaHei'&gt;单元 14 · 第 76 节&lt;/text&gt;&#13;&#10;        &lt;/svg&gt;&#13;&#10;    &lt;/Box&gt;&#13;&#10;&lt;/Slide&gt;&#13;&#10;"/>
         <p:cNvGrpSpPr/>
         <p:nvPr/>
       </p:nvGrpSpPr>
@@ -4405,7 +2579,7 @@
   <p:cSld>
     <p:spTree>
       <p:nvGrpSpPr>
-        <p:cNvPr id="55" name="" descr="&lt;Slide style={{ width: '1280px', height: '720px', backgroundColor: '#FAFCFE', padding: 0, position: 'relative', overflow: 'hidden' }}&gt;&#13;&#10;    &lt;Box style={{ position: 'absolute', left: 64, top: 36, width: '1152px', flexDirection: 'row', alignItems: 'center', gap: 12 }}&gt;&#13;&#10;        &lt;Box style={{ background: '#0E9B78', borderRadius: 5, padding: '3px 11px' }}&gt;&#13;&#10;            &lt;Text style={{ fontSize: 14, fontWeight: 'bold', color: '#FFFFFF' }}&gt;第 77 节&lt;/Text&gt;&#13;&#10;        &lt;/Box&gt;&#13;&#10;        &lt;Text style={{ fontSize: 30, fontWeight: 'bold', color: '#16232E' }}&gt;核心知识点&lt;/Text&gt;&#13;&#10;        &lt;Text style={{ fontSize: 15, color: '#5A6B7A', marginTop: 10 }}&gt;· 动态难度与余下飞船数&lt;/Text&gt;&#13;&#10;    &lt;/Box&gt;&#13;&#10;    &lt;Box style={{ position: 'absolute', left: 0, top: 0, width: '1280px', height: '720px' }}&gt;&#13;&#10;        &lt;svg width='1280' height='720' viewBox='0 0 1280 720'&gt;&#13;&#10;            &lt;rect x='64' y='96' width='548' height='330' rx='12' fill='#FFFFFF' stroke='#D8E3EE' /&gt;&lt;rect x='64' y='96' width='548' height='4' rx='2' fill='#1F5FA8' /&gt;&lt;text x='82' y='130' fontSize='15.5' fontWeight='bold' fill='#1F5FA8' textAnchor='start' fontFamily='Microsoft YaHei'&gt;2.5 动态难度：speedup_scale 与 scor…&lt;/text&gt;&lt;text x='82' y='169.0' fontSize='13' fill='#3A4A58' textAnchor='start' fontFamily='Microsoft YaHei'&gt;· speedup_scale = 1.1：每升一级，ship_speed / bullet_speed…&lt;/text&gt;&lt;text x='82' y='197.5' fontSize='13' fill='#3A4A58' textAnchor='start' fontFamily='Microsoft YaHei'&gt;· score_scale = 1.5：每升一级，alien_points 乘 1.5。&lt;/text&gt;&lt;text x='82' y='226.0' fontSize='13' fill='#3A4A58' textAnchor='start' fontFamily='Microsoft YaHei'&gt;· initialize_dynamic_settings()：取初始值，点 Play 重置时调用。&lt;/text&gt;&lt;rect x='668' y='96' width='548' height='330' rx='12' fill='#FFFFFF' stroke='#D8E3EE' /&gt;&lt;rect x='668' y='96' width='548' height='4' rx='2' fill='#1F5FA8' /&gt;&lt;text x='686' y='130' fontSize='15.5' fontWeight='bold' fill='#1F5FA8' textAnchor='start' fontFamily='Microsoft YaHei'&gt;2.6 余下的飞船数：Group + Ship 的复用&lt;/text&gt;&lt;text x='686' y='169.0' fontSize='13' fill='#3A4A58' textAnchor='start' fontFamily='Microsoft YaHei'&gt;· Group() 是 Pygame 的精灵编组，像一艘航空母舰，把一堆 Sprite 装进去统一管理&lt;/text&gt;&lt;text x='686' y='188.5' fontSize='13' fill='#3A4A58' textAnchor='start' fontFamily='Microsoft YaHei'&gt;，s…&lt;/text&gt;&lt;text x='686' y='217.0' fontSize='13' fill='#3A4A58' textAnchor='start' fontFamily='Microsoft YaHei'&gt;· 每个小图标都是一个完整的 Ship 对象——有图片、有 rect、有速度，只是不更新位&lt;/text&gt;&lt;text x='686' y='236.5' fontSize='13' fill='#3A4A58' textAnchor='start' fontFamily='Microsoft YaHei'&gt;置，纯粹借它的「…&lt;/text&gt;&lt;text x='686' y='265.0' fontSize='13' fill='#3A4A58' textAnchor='start' fontFamily='Microsoft YaHei'&gt;· ship.rect.width 是图片宽度，用它当间距，图标之间刚好不重叠。&lt;/text&gt;&lt;rect x='64' y='574' width='1152' height='66' rx='12' fill='#EEF5FB' /&gt;&lt;text x='84' y='616' fontSize='14' fill='#243444' textAnchor='start' fontFamily='Microsoft YaHei'&gt;看不懂的地方先回讲义对应小节读一遍，再回来对着这页复述一次——能讲出来才算真懂。&lt;/text&gt;&#13;&#10;            &lt;text x='64' y='684' fontSize='13' fill='#8A9AAA' fontFamily='Microsoft YaHei'&gt;Python 讲授课件 · 逐节版&lt;/text&gt;&#13;&#10;            &lt;text x='1216' y='684' fontSize='13' fill='#8A9AAA' textAnchor='end' fontFamily='Microsoft YaHei'&gt;单元 14 · 第 77 节&lt;/text&gt;&#13;&#10;        &lt;/svg&gt;&#13;&#10;    &lt;/Box&gt;&#13;&#10;&lt;/Slide&gt;&#13;&#10;"/>
+        <p:cNvPr id="55" name="" descr="&lt;Slide style={{ width: '1280px', height: '720px', backgroundColor: '#FAFCFE', padding: 0, position: 'relative', overflow: 'hidden' }}&gt;&#13;&#10;    &lt;Box style={{ position: 'absolute', left: 64, top: 36, width: '1152px', flexDirection: 'row', alignItems: 'center', gap: 12 }}&gt;&#13;&#10;        &lt;Box style={{ background: '#0E9B78', borderRadius: 5, padding: '3px 11px' }}&gt;&#13;&#10;            &lt;Text style={{ fontSize: 14, fontWeight: 'bold', color: '#FFFFFF' }}&gt;第 77 节&lt;/Text&gt;&#13;&#10;        &lt;/Box&gt;&#13;&#10;        &lt;Text style={{ fontSize: 30, fontWeight: 'bold', color: '#16232E' }}&gt;核心知识点&lt;/Text&gt;&#13;&#10;        &lt;Text style={{ fontSize: 15, color: '#5A6B7A', marginTop: 10 }}&gt;· 动态难度与余下飞船数&lt;/Text&gt;&#13;&#10;    &lt;/Box&gt;&#13;&#10;    &lt;Box style={{ position: 'absolute', left: 0, top: 0, width: '1280px', height: '720px' }}&gt;&#13;&#10;        &lt;svg width='1280' height='720' viewBox='0 0 1280 720'&gt;&#13;&#10;            &lt;rect x='64' y='96' width='548' height='330' rx='12' fill='#FFFFFF' stroke='#D8E3EE' /&gt;&lt;rect x='64' y='96' width='548' height='4' rx='2' fill='#1F5FA8' /&gt;&lt;text x='82' y='130' fontSize='15.5' fontWeight='bold' fill='#1F5FA8' textAnchor='start' fontFamily='Microsoft YaHei'&gt;2.5 动态难度：speedup_scale 与 scor…&lt;/text&gt;&lt;text x='82' y='169.0' fontSize='13' fill='#3A4A58' textAnchor='start' fontFamily='Microsoft YaHei'&gt;· speedup_scale = 1.1：每升一级，ship_speed / bullet_speed…&lt;/text&gt;&lt;text x='82' y='197.5' fontSize='13' fill='#3A4A58' textAnchor='start' fontFamily='Microsoft YaHei'&gt;· score_scale = 1.5：每升一级，alien_points 乘 1.5。&lt;/text&gt;&lt;text x='82' y='226.0' fontSize='13' fill='#3A4A58' textAnchor='start' fontFamily='Microsoft YaHei'&gt;· initialize_dynamic_settings()：取初始值，点 Play 重置时调用。&lt;/text&gt;&lt;rect x='668' y='96' width='548' height='330' rx='12' fill='#FFFFFF' stroke='#D8E3EE' /&gt;&lt;rect x='668' y='96' width='548' height='4' rx='2' fill='#1F5FA8' /&gt;&lt;text x='686' y='130' fontSize='15.5' fontWeight='bold' fill='#1F5FA8' textAnchor='start' fontFamily='Microsoft YaHei'&gt;2.6 余下的飞船数：Group + Ship 的复用&lt;/text&gt;&lt;text x='686' y='169.0' fontSize='13' fill='#3A4A58' textAnchor='start' fontFamily='Microsoft YaHei'&gt;· Group() 是 Pygame 的精灵编组，像一艘航空母舰，把一堆 Sprite&lt;/text&gt;&lt;text x='686' y='188.5' fontSize='13' fill='#3A4A58' textAnchor='start' fontFamily='Microsoft YaHei'&gt;装进去统一管理…&lt;/text&gt;&lt;text x='686' y='217.0' fontSize='13' fill='#3A4A58' textAnchor='start' fontFamily='Microsoft YaHei'&gt;· 每个小图标都是一个完整的 Ship 对象——有图片、有 rect、有速度，&lt;/text&gt;&lt;text x='686' y='236.5' fontSize='13' fill='#3A4A58' textAnchor='start' fontFamily='Microsoft YaHei'&gt;只是不更新位置…&lt;/text&gt;&lt;text x='686' y='265.0' fontSize='13' fill='#3A4A58' textAnchor='start' fontFamily='Microsoft YaHei'&gt;· ship.rect.width 是图片宽度，用它当间距，图标之间刚好不重叠。&lt;/text&gt;&lt;rect x='64' y='574' width='1152' height='66' rx='12' fill='#EEF5FB' /&gt;&lt;text x='84' y='616' fontSize='14' fill='#243444' textAnchor='start' fontFamily='Microsoft YaHei'&gt;看不懂的地方先回讲义对应小节读一遍，再回来对着这页复述一次——能讲出来才算真懂。&lt;/text&gt;&#13;&#10;            &lt;text x='64' y='684' fontSize='13' fill='#8A9AAA' fontFamily='Microsoft YaHei'&gt;Python 讲授课件 · 逐节版&lt;/text&gt;&#13;&#10;            &lt;text x='1216' y='684' fontSize='13' fill='#8A9AAA' textAnchor='end' fontFamily='Microsoft YaHei'&gt;单元 14 · 第 77 节&lt;/text&gt;&#13;&#10;        &lt;/svg&gt;&#13;&#10;    &lt;/Box&gt;&#13;&#10;&lt;/Slide&gt;&#13;&#10;"/>
         <p:cNvGrpSpPr/>
         <p:nvPr/>
       </p:nvGrpSpPr>
@@ -4836,7 +3010,7 @@
   <p:cSld>
     <p:spTree>
       <p:nvGrpSpPr>
-        <p:cNvPr id="68" name="" descr="&lt;Slide style={{ width: '1280px', height: '720px', backgroundColor: '#FAFCFE', padding: 0, position: 'relative', overflow: 'hidden' }}&gt;&#13;&#10;    &lt;Box style={{ position: 'absolute', left: 64, top: 36, width: '1152px', flexDirection: 'row', alignItems: 'center', gap: 12 }}&gt;&#13;&#10;        &lt;Box style={{ background: '#0E9B78', borderRadius: 5, padding: '3px 11px' }}&gt;&#13;&#10;            &lt;Text style={{ fontSize: 14, fontWeight: 'bold', color: '#FFFFFF' }}&gt;第 78 节&lt;/Text&gt;&#13;&#10;        &lt;/Box&gt;&#13;&#10;        &lt;Text style={{ fontSize: 30, fontWeight: 'bold', color: '#16232E' }}&gt;核心知识点&lt;/Text&gt;&#13;&#10;        &lt;Text style={{ fontSize: 15, color: '#5A6B7A', marginTop: 10 }}&gt;· 实战、答案与自查&lt;/Text&gt;&#13;&#10;    &lt;/Box&gt;&#13;&#10;    &lt;Box style={{ position: 'absolute', left: 0, top: 0, width: '1280px', height: '720px' }}&gt;&#13;&#10;        &lt;svg width='1280' height='720' viewBox='0 0 1280 720'&gt;&#13;&#10;            &lt;rect x='64' y='96' width='368' height='330' rx='12' fill='#FFFFFF' stroke='#D8E3EE' /&gt;&lt;rect x='64' y='96' width='368' height='4' rx='2' fill='#1F5FA8' /&gt;&lt;text x='82' y='130' fontSize='15.5' fontWeight='bold' fill='#1F5FA8' textAnchor='start' fontFamily='Microsoft YaHei'&gt;基础档&lt;/text&gt;&lt;text x='82' y='169.0' fontSize='13' fill='#3A4A58' textAnchor='start' fontFamily='Microsoft YaHei'&gt;· 练习 14-1【按钮定位函数】&lt;/text&gt;&lt;text x='82' y='197.5' fontSize='13' fill='#3A4A58' textAnchor='start' fontFamily='Microsoft YaHei'&gt;· 练习 14-2【GameStats 的生命周期】&lt;/text&gt;&lt;rect x='468' y='96' width='368' height='330' rx='12' fill='#FFFFFF' stroke='#D8E3EE' /&gt;&lt;rect x='468' y='96' width='368' height='4' rx='2' fill='#1F5FA8' /&gt;&lt;text x='486' y='130' fontSize='15.5' fontWeight='bold' fill='#1F5FA8' textAnchor='start' fontFamily='Microsoft YaHei'&gt;进阶档&lt;/text&gt;&lt;text x='486' y='169.0' fontSize='13' fill='#3A4A58' textAnchor='start' fontFamily='Microsoft YaHei'&gt;· 练习 14-3【Play 按钮的显隐与光标】&lt;/text&gt;&lt;text x='486' y='197.5' fontSize='13' fill='#3A4A58' textAnchor='start' fontFamily='Microsoft YaHei'&gt;· 练习 14-4【最高分持久化】（教材未涉及，补充说明：&lt;/text&gt;&lt;text x='486' y='217.0' fontSize='13' fill='#3A4A58' textAnchor='start' fontFamily='Microsoft YaHei'&gt;练习性质的增强）&lt;/text&gt;&lt;rect x='872' y='96' width='368' height='330' rx='12' fill='#FFFFFF' stroke='#D8E3EE' /&gt;&lt;rect x='872' y='96' width='368' height='4' rx='2' fill='#1F5FA8' /&gt;&lt;text x='890' y='130' fontSize='15.5' fontWeight='bold' fill='#1F5FA8' textAnchor='start' fontFamily='Microsoft YaHei'&gt;参考答案 14-1&lt;/text&gt;&lt;text x='890' y='169.0' fontSize='13' fill='#3A4A58' textAnchor='start' fontFamily='Microsoft YaHei'&gt;· 预期输出：&lt;/text&gt;&lt;text x='64' y='470' fontSize='14.5' fontWeight='bold' fill='#0E9B78' textAnchor='start' fontFamily='Microsoft YaHei'&gt;本节的代码示例&lt;/text&gt;&lt;text x='64' y='500' fontSize='13' fill='#3A4A58' textAnchor='start' fontFamily='Microsoft YaHei'&gt;· 完整的 Button 类 + 点击判定&lt;/text&gt;&lt;text x='468' y='500' fontSize='13' fill='#3A4A58' textAnchor='start' fontFamily='Microsoft YaHei'&gt;· 动态难度——initialize_dynamic_settings…&lt;/text&gt;&lt;text x='872' y='500' fontSize='13' fill='#3A4A58' textAnchor='start' fontFamily='Microsoft YaHei'&gt;· Scoreboard 的「准备图像」模式&lt;/text&gt;&lt;rect x='64' y='574' width='1152' height='66' rx='12' fill='#EEF5FB' /&gt;&lt;text x='84' y='616' fontSize='14' fill='#243444' textAnchor='start' fontFamily='Microsoft YaHei'&gt;看不懂的地方先回讲义对应小节读一遍，再回来对着这页复述一次——能讲出来才算真懂。&lt;/text&gt;&#13;&#10;            &lt;text x='64' y='684' fontSize='13' fill='#8A9AAA' fontFamily='Microsoft YaHei'&gt;Python 讲授课件 · 逐节版&lt;/text&gt;&#13;&#10;            &lt;text x='1216' y='684' fontSize='13' fill='#8A9AAA' textAnchor='end' fontFamily='Microsoft YaHei'&gt;单元 14 · 第 78 节&lt;/text&gt;&#13;&#10;        &lt;/svg&gt;&#13;&#10;    &lt;/Box&gt;&#13;&#10;&lt;/Slide&gt;&#13;&#10;"/>
+        <p:cNvPr id="68" name="" descr="&lt;Slide style={{ width: '1280px', height: '720px', backgroundColor: '#FAFCFE', padding: 0, position: 'relative', overflow: 'hidden' }}&gt;&#13;&#10;    &lt;Box style={{ position: 'absolute', left: 64, top: 36, width: '1152px', flexDirection: 'row', alignItems: 'center', gap: 12 }}&gt;&#13;&#10;        &lt;Box style={{ background: '#0E9B78', borderRadius: 5, padding: '3px 11px' }}&gt;&#13;&#10;            &lt;Text style={{ fontSize: 14, fontWeight: 'bold', color: '#FFFFFF' }}&gt;第 78 节&lt;/Text&gt;&#13;&#10;        &lt;/Box&gt;&#13;&#10;        &lt;Text style={{ fontSize: 30, fontWeight: 'bold', color: '#16232E' }}&gt;核心知识点&lt;/Text&gt;&#13;&#10;        &lt;Text style={{ fontSize: 15, color: '#5A6B7A', marginTop: 10 }}&gt;· 实战、答案与自查&lt;/Text&gt;&#13;&#10;    &lt;/Box&gt;&#13;&#10;    &lt;Box style={{ position: 'absolute', left: 0, top: 0, width: '1280px', height: '720px' }}&gt;&#13;&#10;        &lt;svg width='1280' height='720' viewBox='0 0 1280 720'&gt;&#13;&#10;            &lt;rect x='64' y='96' width='368' height='330' rx='12' fill='#FFFFFF' stroke='#D8E3EE' /&gt;&lt;rect x='64' y='96' width='368' height='4' rx='2' fill='#1F5FA8' /&gt;&lt;text x='82' y='130' fontSize='15.5' fontWeight='bold' fill='#1F5FA8' textAnchor='start' fontFamily='Microsoft YaHei'&gt;基础档&lt;/text&gt;&lt;text x='82' y='169.0' fontSize='13' fill='#3A4A58' textAnchor='start' fontFamily='Microsoft YaHei'&gt;· 练习 14-1【按钮定位函数】&lt;/text&gt;&lt;text x='82' y='197.5' fontSize='13' fill='#3A4A58' textAnchor='start' fontFamily='Microsoft YaHei'&gt;· 练习 14-2【GameStats 的生命周期】&lt;/text&gt;&lt;rect x='468' y='96' width='368' height='330' rx='12' fill='#FFFFFF' stroke='#D8E3EE' /&gt;&lt;rect x='468' y='96' width='368' height='4' rx='2' fill='#1F5FA8' /&gt;&lt;text x='486' y='130' fontSize='15.5' fontWeight='bold' fill='#1F5FA8' textAnchor='start' fontFamily='Microsoft YaHei'&gt;进阶档&lt;/text&gt;&lt;text x='486' y='169.0' fontSize='13' fill='#3A4A58' textAnchor='start' fontFamily='Microsoft YaHei'&gt;· 练习 14-3【Play 按钮的显隐与光标】&lt;/text&gt;&lt;text x='486' y='197.5' fontSize='13' fill='#3A4A58' textAnchor='start' fontFamily='Microsoft YaHei'&gt;· 练习 14-4【最高分持久化】（教材未涉及，补充说明：&lt;/text&gt;&lt;text x='486' y='217.0' fontSize='13' fill='#3A4A58' textAnchor='start' fontFamily='Microsoft YaHei'&gt;练习性质的增强）&lt;/text&gt;&lt;rect x='872' y='96' width='368' height='330' rx='12' fill='#FFFFFF' stroke='#D8E3EE' /&gt;&lt;rect x='872' y='96' width='368' height='4' rx='2' fill='#1F5FA8' /&gt;&lt;text x='890' y='130' fontSize='15.5' fontWeight='bold' fill='#1F5FA8' textAnchor='start' fontFamily='Microsoft YaHei'&gt;参考答案 14-1&lt;/text&gt;&lt;text x='890' y='169.0' fontSize='13' fill='#3A4A58' textAnchor='start' fontFamily='Microsoft YaHei'&gt;· 预期输出&lt;/text&gt;&lt;text x='64' y='470' fontSize='14.5' fontWeight='bold' fill='#0E9B78' textAnchor='start' fontFamily='Microsoft YaHei'&gt;本节的代码示例&lt;/text&gt;&lt;text x='64' y='500' fontSize='13' fill='#3A4A58' textAnchor='start' fontFamily='Microsoft YaHei'&gt;· 完整的 Button 类 + 点击判定&lt;/text&gt;&lt;text x='468' y='500' fontSize='13' fill='#3A4A58' textAnchor='start' fontFamily='Microsoft YaHei'&gt;· 动态难度——initialize_dynamic_settings…&lt;/text&gt;&lt;text x='872' y='500' fontSize='13' fill='#3A4A58' textAnchor='start' fontFamily='Microsoft YaHei'&gt;· Scoreboard 的「准备图像」模式&lt;/text&gt;&lt;rect x='64' y='574' width='1152' height='66' rx='12' fill='#EEF5FB' /&gt;&lt;text x='84' y='616' fontSize='14' fill='#243444' textAnchor='start' fontFamily='Microsoft YaHei'&gt;看不懂的地方先回讲义对应小节读一遍，再回来对着这页复述一次——能讲出来才算真懂。&lt;/text&gt;&#13;&#10;            &lt;text x='64' y='684' fontSize='13' fill='#8A9AAA' fontFamily='Microsoft YaHei'&gt;Python 讲授课件 · 逐节版&lt;/text&gt;&#13;&#10;            &lt;text x='1216' y='684' fontSize='13' fill='#8A9AAA' textAnchor='end' fontFamily='Microsoft YaHei'&gt;单元 14 · 第 78 节&lt;/text&gt;&#13;&#10;        &lt;/svg&gt;&#13;&#10;    &lt;/Box&gt;&#13;&#10;&lt;/Slide&gt;&#13;&#10;"/>
         <p:cNvGrpSpPr/>
         <p:nvPr/>
       </p:nvGrpSpPr>

--- a/python-course-ppt/逐节课件/Python讲授课件-单元14.pptx
+++ b/python-course-ppt/逐节课件/Python讲授课件-单元14.pptx
@@ -234,6 +234,1044 @@
     </a:lvl9pPr>
   </p:notesStyle>
 </p:notesMaster>
+</file>
+
+<file path=ppt/notesSlides/notesSlide1.xml><?xml version="1.0" encoding="utf-8"?>
+<p:notes xmlns:a="http://schemas.openxmlformats.org/drawingml/2006/main" xmlns:p="http://schemas.openxmlformats.org/presentationml/2006/main" xmlns:r="http://schemas.openxmlformats.org/officeDocument/2006/relationships">
+  <p:cSld>
+    <p:spTree>
+      <p:nvGrpSpPr>
+        <p:cNvPr id="1" name=""/>
+        <p:cNvGrpSpPr/>
+        <p:nvPr/>
+      </p:nvGrpSpPr>
+      <p:grpSpPr>
+        <a:xfrm>
+          <a:off x="0" y="0"/>
+          <a:ext cx="0" cy="0"/>
+          <a:chOff x="0" y="0"/>
+          <a:chExt cx="0" cy="0"/>
+        </a:xfrm>
+      </p:grpSpPr>
+      <p:sp>
+        <p:nvSpPr>
+          <p:cNvPr id="2" name="讲课提示"/>
+          <p:cNvSpPr txBox="1"/>
+          <p:nvPr/>
+        </p:nvSpPr>
+        <p:spPr>
+          <a:xfrm>
+            <a:off x="457200" y="457200"/>
+            <a:ext cx="6858000" cy="4800600"/>
+          </a:xfrm>
+          <a:prstGeom prst="rect">
+            <a:avLst/>
+          </a:prstGeom>
+        </p:spPr>
+        <p:txBody>
+          <a:bodyPr wrap="square"/>
+          <a:lstStyle/>
+          <a:p>
+            <a:r>
+              <a:rPr lang="zh-CN" dirty="0"/>
+              <a:t>单元 14 · 单元 14 · Play 按钮与记分</a:t>
+            </a:r>
+          </a:p>
+          <a:p>
+            <a:r>
+              <a:rPr lang="zh-CN" dirty="0"/>
+              <a:t/>
+            </a:r>
+          </a:p>
+          <a:p>
+            <a:r>
+              <a:rPr lang="zh-CN" dirty="0"/>
+              <a:t>本单元包含以下课节：</a:t>
+            </a:r>
+          </a:p>
+          <a:p>
+            <a:r>
+              <a:rPr lang="zh-CN" dirty="0"/>
+              <a:t>· 第 75 节 游戏状态机与 Button 类</a:t>
+            </a:r>
+          </a:p>
+          <a:p>
+            <a:r>
+              <a:rPr lang="zh-CN" dirty="0"/>
+              <a:t>· 第 76 节 记分牌与数据格式化</a:t>
+            </a:r>
+          </a:p>
+          <a:p>
+            <a:r>
+              <a:rPr lang="zh-CN" dirty="0"/>
+              <a:t>· 第 77 节 动态难度与余下飞船数</a:t>
+            </a:r>
+          </a:p>
+          <a:p>
+            <a:r>
+              <a:rPr lang="zh-CN" dirty="0"/>
+              <a:t>· 第 78 节 实战、答案与自查</a:t>
+            </a:r>
+          </a:p>
+          <a:p>
+            <a:r>
+              <a:rPr lang="zh-CN" dirty="0"/>
+              <a:t/>
+            </a:r>
+          </a:p>
+          <a:p>
+            <a:r>
+              <a:rPr lang="zh-CN" dirty="0"/>
+              <a:t>开场用 3 分钟讲清：这个单元学完能做出什么，最后会被关卡怎么验。</a:t>
+            </a:r>
+          </a:p>
+        </p:txBody>
+      </p:sp>
+    </p:spTree>
+  </p:cSld>
+  <p:clrMapOvr>
+    <a:masterClrMapping/>
+  </p:clrMapOvr>
+</p:notes>
+</file>
+
+<file path=ppt/notesSlides/notesSlide10.xml><?xml version="1.0" encoding="utf-8"?>
+<p:notes xmlns:a="http://schemas.openxmlformats.org/drawingml/2006/main" xmlns:p="http://schemas.openxmlformats.org/presentationml/2006/main" xmlns:r="http://schemas.openxmlformats.org/officeDocument/2006/relationships">
+  <p:cSld>
+    <p:spTree>
+      <p:nvGrpSpPr>
+        <p:cNvPr id="1" name=""/>
+        <p:cNvGrpSpPr/>
+        <p:nvPr/>
+      </p:nvGrpSpPr>
+      <p:grpSpPr>
+        <a:xfrm>
+          <a:off x="0" y="0"/>
+          <a:ext cx="0" cy="0"/>
+          <a:chOff x="0" y="0"/>
+          <a:chExt cx="0" cy="0"/>
+        </a:xfrm>
+      </p:grpSpPr>
+      <p:sp>
+        <p:nvSpPr>
+          <p:cNvPr id="2" name="讲课提示"/>
+          <p:cNvSpPr txBox="1"/>
+          <p:nvPr/>
+        </p:nvSpPr>
+        <p:spPr>
+          <a:xfrm>
+            <a:off x="457200" y="457200"/>
+            <a:ext cx="6858000" cy="4800600"/>
+          </a:xfrm>
+          <a:prstGeom prst="rect">
+            <a:avLst/>
+          </a:prstGeom>
+        </p:spPr>
+        <p:txBody>
+          <a:bodyPr wrap="square"/>
+          <a:lstStyle/>
+          <a:p>
+            <a:r>
+              <a:rPr lang="zh-CN" dirty="0"/>
+              <a:t>单元 14 小结 · 单元 14 · 小结</a:t>
+            </a:r>
+          </a:p>
+          <a:p>
+            <a:r>
+              <a:rPr lang="zh-CN" dirty="0"/>
+              <a:t/>
+            </a:r>
+          </a:p>
+          <a:p>
+            <a:r>
+              <a:rPr lang="zh-CN" dirty="0"/>
+              <a:t>收尾动作：让学生合上讲义，口述本单元三个最重要的结论；说不出来的，回对应课节。</a:t>
+            </a:r>
+          </a:p>
+          <a:p>
+            <a:r>
+              <a:rPr lang="zh-CN" dirty="0"/>
+              <a:t>然后当场勾一遍本单元课节的「已完成」，没打勾的进下一单元前补掉。</a:t>
+            </a:r>
+          </a:p>
+        </p:txBody>
+      </p:sp>
+    </p:spTree>
+  </p:cSld>
+  <p:clrMapOvr>
+    <a:masterClrMapping/>
+  </p:clrMapOvr>
+</p:notes>
+</file>
+
+<file path=ppt/notesSlides/notesSlide2.xml><?xml version="1.0" encoding="utf-8"?>
+<p:notes xmlns:a="http://schemas.openxmlformats.org/drawingml/2006/main" xmlns:p="http://schemas.openxmlformats.org/presentationml/2006/main" xmlns:r="http://schemas.openxmlformats.org/officeDocument/2006/relationships">
+  <p:cSld>
+    <p:spTree>
+      <p:nvGrpSpPr>
+        <p:cNvPr id="1" name=""/>
+        <p:cNvGrpSpPr/>
+        <p:nvPr/>
+      </p:nvGrpSpPr>
+      <p:grpSpPr>
+        <a:xfrm>
+          <a:off x="0" y="0"/>
+          <a:ext cx="0" cy="0"/>
+          <a:chOff x="0" y="0"/>
+          <a:chExt cx="0" cy="0"/>
+        </a:xfrm>
+      </p:grpSpPr>
+      <p:sp>
+        <p:nvSpPr>
+          <p:cNvPr id="2" name="讲课提示"/>
+          <p:cNvSpPr txBox="1"/>
+          <p:nvPr/>
+        </p:nvSpPr>
+        <p:spPr>
+          <a:xfrm>
+            <a:off x="457200" y="457200"/>
+            <a:ext cx="6858000" cy="4800600"/>
+          </a:xfrm>
+          <a:prstGeom prst="rect">
+            <a:avLst/>
+          </a:prstGeom>
+        </p:spPr>
+        <p:txBody>
+          <a:bodyPr wrap="square"/>
+          <a:lstStyle/>
+          <a:p>
+            <a:r>
+              <a:rPr lang="zh-CN" dirty="0"/>
+              <a:t>第 75 节 · 游戏状态机与 Button 类</a:t>
+            </a:r>
+          </a:p>
+          <a:p>
+            <a:r>
+              <a:rPr lang="zh-CN" dirty="0"/>
+              <a:t>单元 14 · Play 按钮与记分 · W16–W17</a:t>
+            </a:r>
+          </a:p>
+          <a:p>
+            <a:r>
+              <a:rPr lang="zh-CN" dirty="0"/>
+              <a:t/>
+            </a:r>
+          </a:p>
+          <a:p>
+            <a:r>
+              <a:rPr lang="zh-CN" dirty="0"/>
+              <a:t>学习目标：把游戏做成 inactive / active / game over 三态；理解 font.render 才能显示文字</a:t>
+            </a:r>
+          </a:p>
+          <a:p>
+            <a:r>
+              <a:rPr lang="zh-CN" dirty="0"/>
+              <a:t/>
+            </a:r>
+          </a:p>
+          <a:p>
+            <a:r>
+              <a:rPr lang="zh-CN" dirty="0"/>
+              <a:t>课堂实操（40 分钟，不看答案）：</a:t>
+            </a:r>
+          </a:p>
+          <a:p>
+            <a:r>
+              <a:rPr lang="zh-CN" dirty="0"/>
+              <a:t>· 现场写 Button 类并让它响应点击</a:t>
+            </a:r>
+          </a:p>
+          <a:p>
+            <a:r>
+              <a:rPr lang="zh-CN" dirty="0"/>
+              <a:t>· 把 stats.game_active 注释掉，看游戏怎么变</a:t>
+            </a:r>
+          </a:p>
+          <a:p>
+            <a:r>
+              <a:rPr lang="zh-CN" dirty="0"/>
+              <a:t>· 故意点 Play 两次，看会重置几次</a:t>
+            </a:r>
+          </a:p>
+          <a:p>
+            <a:r>
+              <a:rPr lang="zh-CN" dirty="0"/>
+              <a:t/>
+            </a:r>
+          </a:p>
+          <a:p>
+            <a:r>
+              <a:rPr lang="zh-CN" dirty="0"/>
+              <a:t>课后作业：</a:t>
+            </a:r>
+          </a:p>
+          <a:p>
+            <a:r>
+              <a:rPr lang="zh-CN" dirty="0"/>
+              <a:t>· 完成教材 14.1 全部动手练</a:t>
+            </a:r>
+          </a:p>
+          <a:p>
+            <a:r>
+              <a:rPr lang="zh-CN" dirty="0"/>
+              <a:t/>
+            </a:r>
+          </a:p>
+          <a:p>
+            <a:r>
+              <a:rPr lang="zh-CN" dirty="0"/>
+              <a:t>节奏：讲 20 分钟 → 学员自己敲 40 分钟（不看答案）→ 对讲评自查 20 分钟 → 写作业 10 分钟。</a:t>
+            </a:r>
+          </a:p>
+        </p:txBody>
+      </p:sp>
+    </p:spTree>
+  </p:cSld>
+  <p:clrMapOvr>
+    <a:masterClrMapping/>
+  </p:clrMapOvr>
+</p:notes>
+</file>
+
+<file path=ppt/notesSlides/notesSlide3.xml><?xml version="1.0" encoding="utf-8"?>
+<p:notes xmlns:a="http://schemas.openxmlformats.org/drawingml/2006/main" xmlns:p="http://schemas.openxmlformats.org/presentationml/2006/main" xmlns:r="http://schemas.openxmlformats.org/officeDocument/2006/relationships">
+  <p:cSld>
+    <p:spTree>
+      <p:nvGrpSpPr>
+        <p:cNvPr id="1" name=""/>
+        <p:cNvGrpSpPr/>
+        <p:nvPr/>
+      </p:nvGrpSpPr>
+      <p:grpSpPr>
+        <a:xfrm>
+          <a:off x="0" y="0"/>
+          <a:ext cx="0" cy="0"/>
+          <a:chOff x="0" y="0"/>
+          <a:chExt cx="0" cy="0"/>
+        </a:xfrm>
+      </p:grpSpPr>
+      <p:sp>
+        <p:nvSpPr>
+          <p:cNvPr id="2" name="讲课提示"/>
+          <p:cNvSpPr txBox="1"/>
+          <p:nvPr/>
+        </p:nvSpPr>
+        <p:spPr>
+          <a:xfrm>
+            <a:off x="457200" y="457200"/>
+            <a:ext cx="6858000" cy="4800600"/>
+          </a:xfrm>
+          <a:prstGeom prst="rect">
+            <a:avLst/>
+          </a:prstGeom>
+        </p:spPr>
+        <p:txBody>
+          <a:bodyPr wrap="square"/>
+          <a:lstStyle/>
+          <a:p>
+            <a:r>
+              <a:rPr lang="zh-CN" dirty="0"/>
+              <a:t>第 75 节 · 核心知识点：游戏状态机与 Button 类</a:t>
+            </a:r>
+          </a:p>
+          <a:p>
+            <a:r>
+              <a:rPr lang="zh-CN" dirty="0"/>
+              <a:t/>
+            </a:r>
+          </a:p>
+          <a:p>
+            <a:r>
+              <a:rPr lang="zh-CN" dirty="0"/>
+              <a:t>讲这一页时：先让学生说出上节课的结论，再逐块讲要点。</a:t>
+            </a:r>
+          </a:p>
+          <a:p>
+            <a:r>
+              <a:rPr lang="zh-CN" dirty="0"/>
+              <a:t>每讲完一块，问一句「这一步如果写错了，报错会长什么样？」——把错误提前讲。</a:t>
+            </a:r>
+          </a:p>
+          <a:p>
+            <a:r>
+              <a:rPr lang="zh-CN" dirty="0"/>
+              <a:t/>
+            </a:r>
+          </a:p>
+          <a:p>
+            <a:r>
+              <a:rPr lang="zh-CN" dirty="0"/>
+              <a:t>本节目标：把游戏做成 inactive / active / game over 三态；理解 font.render 才能显示文字</a:t>
+            </a:r>
+          </a:p>
+          <a:p>
+            <a:r>
+              <a:rPr lang="zh-CN" dirty="0"/>
+              <a:t/>
+            </a:r>
+          </a:p>
+          <a:p>
+            <a:r>
+              <a:rPr lang="zh-CN" dirty="0"/>
+              <a:t>看不到懂的地方，回讲义对应小节读一遍，再回来对着这页复述一次——能讲出来才算真懂。</a:t>
+            </a:r>
+          </a:p>
+        </p:txBody>
+      </p:sp>
+    </p:spTree>
+  </p:cSld>
+  <p:clrMapOvr>
+    <a:masterClrMapping/>
+  </p:clrMapOvr>
+</p:notes>
+</file>
+
+<file path=ppt/notesSlides/notesSlide4.xml><?xml version="1.0" encoding="utf-8"?>
+<p:notes xmlns:a="http://schemas.openxmlformats.org/drawingml/2006/main" xmlns:p="http://schemas.openxmlformats.org/presentationml/2006/main" xmlns:r="http://schemas.openxmlformats.org/officeDocument/2006/relationships">
+  <p:cSld>
+    <p:spTree>
+      <p:nvGrpSpPr>
+        <p:cNvPr id="1" name=""/>
+        <p:cNvGrpSpPr/>
+        <p:nvPr/>
+      </p:nvGrpSpPr>
+      <p:grpSpPr>
+        <a:xfrm>
+          <a:off x="0" y="0"/>
+          <a:ext cx="0" cy="0"/>
+          <a:chOff x="0" y="0"/>
+          <a:chExt cx="0" cy="0"/>
+        </a:xfrm>
+      </p:grpSpPr>
+      <p:sp>
+        <p:nvSpPr>
+          <p:cNvPr id="2" name="讲课提示"/>
+          <p:cNvSpPr txBox="1"/>
+          <p:nvPr/>
+        </p:nvSpPr>
+        <p:spPr>
+          <a:xfrm>
+            <a:off x="457200" y="457200"/>
+            <a:ext cx="6858000" cy="4800600"/>
+          </a:xfrm>
+          <a:prstGeom prst="rect">
+            <a:avLst/>
+          </a:prstGeom>
+        </p:spPr>
+        <p:txBody>
+          <a:bodyPr wrap="square"/>
+          <a:lstStyle/>
+          <a:p>
+            <a:r>
+              <a:rPr lang="zh-CN" dirty="0"/>
+              <a:t>第 76 节 · 记分牌与数据格式化</a:t>
+            </a:r>
+          </a:p>
+          <a:p>
+            <a:r>
+              <a:rPr lang="zh-CN" dirty="0"/>
+              <a:t>单元 14 · Play 按钮与记分 · W17</a:t>
+            </a:r>
+          </a:p>
+          <a:p>
+            <a:r>
+              <a:rPr lang="zh-CN" dirty="0"/>
+              <a:t/>
+            </a:r>
+          </a:p>
+          <a:p>
+            <a:r>
+              <a:rPr lang="zh-CN" dirty="0"/>
+              <a:t>学习目标：用 prep_* 方法把数据渲染成图像；掌握 round 和千分位格式化</a:t>
+            </a:r>
+          </a:p>
+          <a:p>
+            <a:r>
+              <a:rPr lang="zh-CN" dirty="0"/>
+              <a:t/>
+            </a:r>
+          </a:p>
+          <a:p>
+            <a:r>
+              <a:rPr lang="zh-CN" dirty="0"/>
+              <a:t>课堂实操（40 分钟，不看答案）：</a:t>
+            </a:r>
+          </a:p>
+          <a:p>
+            <a:r>
+              <a:rPr lang="zh-CN" dirty="0"/>
+              <a:t>· 实现 prep_score 与 prep_high_score</a:t>
+            </a:r>
+          </a:p>
+          <a:p>
+            <a:r>
+              <a:rPr lang="zh-CN" dirty="0"/>
+              <a:t>· 把 round(score, -1) 去掉，看分数怎么变</a:t>
+            </a:r>
+          </a:p>
+          <a:p>
+            <a:r>
+              <a:rPr lang="zh-CN" dirty="0"/>
+              <a:t/>
+            </a:r>
+          </a:p>
+          <a:p>
+            <a:r>
+              <a:rPr lang="zh-CN" dirty="0"/>
+              <a:t>课后作业：</a:t>
+            </a:r>
+          </a:p>
+          <a:p>
+            <a:r>
+              <a:rPr lang="zh-CN" dirty="0"/>
+              <a:t>· 完成教材 14.3 全部动手练</a:t>
+            </a:r>
+          </a:p>
+          <a:p>
+            <a:r>
+              <a:rPr lang="zh-CN" dirty="0"/>
+              <a:t/>
+            </a:r>
+          </a:p>
+          <a:p>
+            <a:r>
+              <a:rPr lang="zh-CN" dirty="0"/>
+              <a:t>节奏：讲 20 分钟 → 学员自己敲 40 分钟（不看答案）→ 对讲评自查 20 分钟 → 写作业 10 分钟。</a:t>
+            </a:r>
+          </a:p>
+        </p:txBody>
+      </p:sp>
+    </p:spTree>
+  </p:cSld>
+  <p:clrMapOvr>
+    <a:masterClrMapping/>
+  </p:clrMapOvr>
+</p:notes>
+</file>
+
+<file path=ppt/notesSlides/notesSlide5.xml><?xml version="1.0" encoding="utf-8"?>
+<p:notes xmlns:a="http://schemas.openxmlformats.org/drawingml/2006/main" xmlns:p="http://schemas.openxmlformats.org/presentationml/2006/main" xmlns:r="http://schemas.openxmlformats.org/officeDocument/2006/relationships">
+  <p:cSld>
+    <p:spTree>
+      <p:nvGrpSpPr>
+        <p:cNvPr id="1" name=""/>
+        <p:cNvGrpSpPr/>
+        <p:nvPr/>
+      </p:nvGrpSpPr>
+      <p:grpSpPr>
+        <a:xfrm>
+          <a:off x="0" y="0"/>
+          <a:ext cx="0" cy="0"/>
+          <a:chOff x="0" y="0"/>
+          <a:chExt cx="0" cy="0"/>
+        </a:xfrm>
+      </p:grpSpPr>
+      <p:sp>
+        <p:nvSpPr>
+          <p:cNvPr id="2" name="讲课提示"/>
+          <p:cNvSpPr txBox="1"/>
+          <p:nvPr/>
+        </p:nvSpPr>
+        <p:spPr>
+          <a:xfrm>
+            <a:off x="457200" y="457200"/>
+            <a:ext cx="6858000" cy="4800600"/>
+          </a:xfrm>
+          <a:prstGeom prst="rect">
+            <a:avLst/>
+          </a:prstGeom>
+        </p:spPr>
+        <p:txBody>
+          <a:bodyPr wrap="square"/>
+          <a:lstStyle/>
+          <a:p>
+            <a:r>
+              <a:rPr lang="zh-CN" dirty="0"/>
+              <a:t>第 76 节 · 核心知识点：记分牌与数据格式化</a:t>
+            </a:r>
+          </a:p>
+          <a:p>
+            <a:r>
+              <a:rPr lang="zh-CN" dirty="0"/>
+              <a:t/>
+            </a:r>
+          </a:p>
+          <a:p>
+            <a:r>
+              <a:rPr lang="zh-CN" dirty="0"/>
+              <a:t>讲这一页时：先让学生说出上节课的结论，再逐块讲要点。</a:t>
+            </a:r>
+          </a:p>
+          <a:p>
+            <a:r>
+              <a:rPr lang="zh-CN" dirty="0"/>
+              <a:t>每讲完一块，问一句「这一步如果写错了，报错会长什么样？」——把错误提前讲。</a:t>
+            </a:r>
+          </a:p>
+          <a:p>
+            <a:r>
+              <a:rPr lang="zh-CN" dirty="0"/>
+              <a:t/>
+            </a:r>
+          </a:p>
+          <a:p>
+            <a:r>
+              <a:rPr lang="zh-CN" dirty="0"/>
+              <a:t>本节目标：用 prep_* 方法把数据渲染成图像；掌握 round 和千分位格式化</a:t>
+            </a:r>
+          </a:p>
+          <a:p>
+            <a:r>
+              <a:rPr lang="zh-CN" dirty="0"/>
+              <a:t/>
+            </a:r>
+          </a:p>
+          <a:p>
+            <a:r>
+              <a:rPr lang="zh-CN" dirty="0"/>
+              <a:t>看不到懂的地方，回讲义对应小节读一遍，再回来对着这页复述一次——能讲出来才算真懂。</a:t>
+            </a:r>
+          </a:p>
+        </p:txBody>
+      </p:sp>
+    </p:spTree>
+  </p:cSld>
+  <p:clrMapOvr>
+    <a:masterClrMapping/>
+  </p:clrMapOvr>
+</p:notes>
+</file>
+
+<file path=ppt/notesSlides/notesSlide6.xml><?xml version="1.0" encoding="utf-8"?>
+<p:notes xmlns:a="http://schemas.openxmlformats.org/drawingml/2006/main" xmlns:p="http://schemas.openxmlformats.org/presentationml/2006/main" xmlns:r="http://schemas.openxmlformats.org/officeDocument/2006/relationships">
+  <p:cSld>
+    <p:spTree>
+      <p:nvGrpSpPr>
+        <p:cNvPr id="1" name=""/>
+        <p:cNvGrpSpPr/>
+        <p:nvPr/>
+      </p:nvGrpSpPr>
+      <p:grpSpPr>
+        <a:xfrm>
+          <a:off x="0" y="0"/>
+          <a:ext cx="0" cy="0"/>
+          <a:chOff x="0" y="0"/>
+          <a:chExt cx="0" cy="0"/>
+        </a:xfrm>
+      </p:grpSpPr>
+      <p:sp>
+        <p:nvSpPr>
+          <p:cNvPr id="2" name="讲课提示"/>
+          <p:cNvSpPr txBox="1"/>
+          <p:nvPr/>
+        </p:nvSpPr>
+        <p:spPr>
+          <a:xfrm>
+            <a:off x="457200" y="457200"/>
+            <a:ext cx="6858000" cy="4800600"/>
+          </a:xfrm>
+          <a:prstGeom prst="rect">
+            <a:avLst/>
+          </a:prstGeom>
+        </p:spPr>
+        <p:txBody>
+          <a:bodyPr wrap="square"/>
+          <a:lstStyle/>
+          <a:p>
+            <a:r>
+              <a:rPr lang="zh-CN" dirty="0"/>
+              <a:t>第 77 节 · 动态难度与余下飞船数</a:t>
+            </a:r>
+          </a:p>
+          <a:p>
+            <a:r>
+              <a:rPr lang="zh-CN" dirty="0"/>
+              <a:t>单元 14 · Play 按钮与记分 · W17</a:t>
+            </a:r>
+          </a:p>
+          <a:p>
+            <a:r>
+              <a:rPr lang="zh-CN" dirty="0"/>
+              <a:t/>
+            </a:r>
+          </a:p>
+          <a:p>
+            <a:r>
+              <a:rPr lang="zh-CN" dirty="0"/>
+              <a:t>学习目标：理解 speedup_scale / score_scale 与 initialize_dynamic_settings 的配合</a:t>
+            </a:r>
+          </a:p>
+          <a:p>
+            <a:r>
+              <a:rPr lang="zh-CN" dirty="0"/>
+              <a:t/>
+            </a:r>
+          </a:p>
+          <a:p>
+            <a:r>
+              <a:rPr lang="zh-CN" dirty="0"/>
+              <a:t>课堂实操（40 分钟，不看答案）：</a:t>
+            </a:r>
+          </a:p>
+          <a:p>
+            <a:r>
+              <a:rPr lang="zh-CN" dirty="0"/>
+              <a:t>· 实现 increase_speed 并观察难度曲线</a:t>
+            </a:r>
+          </a:p>
+          <a:p>
+            <a:r>
+              <a:rPr lang="zh-CN" dirty="0"/>
+              <a:t>· 用 Group + 小 Ship 图标显示余下命数</a:t>
+            </a:r>
+          </a:p>
+          <a:p>
+            <a:r>
+              <a:rPr lang="zh-CN" dirty="0"/>
+              <a:t/>
+            </a:r>
+          </a:p>
+          <a:p>
+            <a:r>
+              <a:rPr lang="zh-CN" dirty="0"/>
+              <a:t>课后作业：</a:t>
+            </a:r>
+          </a:p>
+          <a:p>
+            <a:r>
+              <a:rPr lang="zh-CN" dirty="0"/>
+              <a:t>· ★ 完成动手项目：最高分做 JSON 持久化</a:t>
+            </a:r>
+          </a:p>
+          <a:p>
+            <a:r>
+              <a:rPr lang="zh-CN" dirty="0"/>
+              <a:t/>
+            </a:r>
+          </a:p>
+          <a:p>
+            <a:r>
+              <a:rPr lang="zh-CN" dirty="0"/>
+              <a:t>节奏：讲 20 分钟 → 学员自己敲 40 分钟（不看答案）→ 对讲评自查 20 分钟 → 写作业 10 分钟。</a:t>
+            </a:r>
+          </a:p>
+        </p:txBody>
+      </p:sp>
+    </p:spTree>
+  </p:cSld>
+  <p:clrMapOvr>
+    <a:masterClrMapping/>
+  </p:clrMapOvr>
+</p:notes>
+</file>
+
+<file path=ppt/notesSlides/notesSlide7.xml><?xml version="1.0" encoding="utf-8"?>
+<p:notes xmlns:a="http://schemas.openxmlformats.org/drawingml/2006/main" xmlns:p="http://schemas.openxmlformats.org/presentationml/2006/main" xmlns:r="http://schemas.openxmlformats.org/officeDocument/2006/relationships">
+  <p:cSld>
+    <p:spTree>
+      <p:nvGrpSpPr>
+        <p:cNvPr id="1" name=""/>
+        <p:cNvGrpSpPr/>
+        <p:nvPr/>
+      </p:nvGrpSpPr>
+      <p:grpSpPr>
+        <a:xfrm>
+          <a:off x="0" y="0"/>
+          <a:ext cx="0" cy="0"/>
+          <a:chOff x="0" y="0"/>
+          <a:chExt cx="0" cy="0"/>
+        </a:xfrm>
+      </p:grpSpPr>
+      <p:sp>
+        <p:nvSpPr>
+          <p:cNvPr id="2" name="讲课提示"/>
+          <p:cNvSpPr txBox="1"/>
+          <p:nvPr/>
+        </p:nvSpPr>
+        <p:spPr>
+          <a:xfrm>
+            <a:off x="457200" y="457200"/>
+            <a:ext cx="6858000" cy="4800600"/>
+          </a:xfrm>
+          <a:prstGeom prst="rect">
+            <a:avLst/>
+          </a:prstGeom>
+        </p:spPr>
+        <p:txBody>
+          <a:bodyPr wrap="square"/>
+          <a:lstStyle/>
+          <a:p>
+            <a:r>
+              <a:rPr lang="zh-CN" dirty="0"/>
+              <a:t>第 77 节 · 核心知识点：动态难度与余下飞船数</a:t>
+            </a:r>
+          </a:p>
+          <a:p>
+            <a:r>
+              <a:rPr lang="zh-CN" dirty="0"/>
+              <a:t/>
+            </a:r>
+          </a:p>
+          <a:p>
+            <a:r>
+              <a:rPr lang="zh-CN" dirty="0"/>
+              <a:t>讲这一页时：先让学生说出上节课的结论，再逐块讲要点。</a:t>
+            </a:r>
+          </a:p>
+          <a:p>
+            <a:r>
+              <a:rPr lang="zh-CN" dirty="0"/>
+              <a:t>每讲完一块，问一句「这一步如果写错了，报错会长什么样？」——把错误提前讲。</a:t>
+            </a:r>
+          </a:p>
+          <a:p>
+            <a:r>
+              <a:rPr lang="zh-CN" dirty="0"/>
+              <a:t/>
+            </a:r>
+          </a:p>
+          <a:p>
+            <a:r>
+              <a:rPr lang="zh-CN" dirty="0"/>
+              <a:t>本节目标：理解 speedup_scale / score_scale 与 initialize_dynamic_settings 的配合</a:t>
+            </a:r>
+          </a:p>
+          <a:p>
+            <a:r>
+              <a:rPr lang="zh-CN" dirty="0"/>
+              <a:t/>
+            </a:r>
+          </a:p>
+          <a:p>
+            <a:r>
+              <a:rPr lang="zh-CN" dirty="0"/>
+              <a:t>看不到懂的地方，回讲义对应小节读一遍，再回来对着这页复述一次——能讲出来才算真懂。</a:t>
+            </a:r>
+          </a:p>
+        </p:txBody>
+      </p:sp>
+    </p:spTree>
+  </p:cSld>
+  <p:clrMapOvr>
+    <a:masterClrMapping/>
+  </p:clrMapOvr>
+</p:notes>
+</file>
+
+<file path=ppt/notesSlides/notesSlide8.xml><?xml version="1.0" encoding="utf-8"?>
+<p:notes xmlns:a="http://schemas.openxmlformats.org/drawingml/2006/main" xmlns:p="http://schemas.openxmlformats.org/presentationml/2006/main" xmlns:r="http://schemas.openxmlformats.org/officeDocument/2006/relationships">
+  <p:cSld>
+    <p:spTree>
+      <p:nvGrpSpPr>
+        <p:cNvPr id="1" name=""/>
+        <p:cNvGrpSpPr/>
+        <p:nvPr/>
+      </p:nvGrpSpPr>
+      <p:grpSpPr>
+        <a:xfrm>
+          <a:off x="0" y="0"/>
+          <a:ext cx="0" cy="0"/>
+          <a:chOff x="0" y="0"/>
+          <a:chExt cx="0" cy="0"/>
+        </a:xfrm>
+      </p:grpSpPr>
+      <p:sp>
+        <p:nvSpPr>
+          <p:cNvPr id="2" name="讲课提示"/>
+          <p:cNvSpPr txBox="1"/>
+          <p:nvPr/>
+        </p:nvSpPr>
+        <p:spPr>
+          <a:xfrm>
+            <a:off x="457200" y="457200"/>
+            <a:ext cx="6858000" cy="4800600"/>
+          </a:xfrm>
+          <a:prstGeom prst="rect">
+            <a:avLst/>
+          </a:prstGeom>
+        </p:spPr>
+        <p:txBody>
+          <a:bodyPr wrap="square"/>
+          <a:lstStyle/>
+          <a:p>
+            <a:r>
+              <a:rPr lang="zh-CN" dirty="0"/>
+              <a:t>第 78 节 · 实战、答案与自查</a:t>
+            </a:r>
+          </a:p>
+          <a:p>
+            <a:r>
+              <a:rPr lang="zh-CN" dirty="0"/>
+              <a:t>单元 14 · Play 按钮与记分 · W17</a:t>
+            </a:r>
+          </a:p>
+          <a:p>
+            <a:r>
+              <a:rPr lang="zh-CN" dirty="0"/>
+              <a:t/>
+            </a:r>
+          </a:p>
+          <a:p>
+            <a:r>
+              <a:rPr lang="zh-CN" dirty="0"/>
+              <a:t>学习目标：独立完成单元 14 练习，逐条自查常见错误</a:t>
+            </a:r>
+          </a:p>
+          <a:p>
+            <a:r>
+              <a:rPr lang="zh-CN" dirty="0"/>
+              <a:t/>
+            </a:r>
+          </a:p>
+          <a:p>
+            <a:r>
+              <a:rPr lang="zh-CN" dirty="0"/>
+              <a:t>课堂实操（40 分钟，不看答案）：</a:t>
+            </a:r>
+          </a:p>
+          <a:p>
+            <a:r>
+              <a:rPr lang="zh-CN" dirty="0"/>
+              <a:t>· 限时 30 分钟独立完成基础档</a:t>
+            </a:r>
+          </a:p>
+          <a:p>
+            <a:r>
+              <a:rPr lang="zh-CN" dirty="0"/>
+              <a:t>· 逐条演示六、里的每个错误</a:t>
+            </a:r>
+          </a:p>
+          <a:p>
+            <a:r>
+              <a:rPr lang="zh-CN" dirty="0"/>
+              <a:t/>
+            </a:r>
+          </a:p>
+          <a:p>
+            <a:r>
+              <a:rPr lang="zh-CN" dirty="0"/>
+              <a:t>课后作业：</a:t>
+            </a:r>
+          </a:p>
+          <a:p>
+            <a:r>
+              <a:rPr lang="zh-CN" dirty="0"/>
+              <a:t>· ★ 产出：带 Play 按钮与完整记分牌的外星人入侵</a:t>
+            </a:r>
+          </a:p>
+          <a:p>
+            <a:r>
+              <a:rPr lang="zh-CN" dirty="0"/>
+              <a:t/>
+            </a:r>
+          </a:p>
+          <a:p>
+            <a:r>
+              <a:rPr lang="zh-CN" dirty="0"/>
+              <a:t>节奏：讲 20 分钟 → 学员自己敲 40 分钟（不看答案）→ 对讲评自查 20 分钟 → 写作业 10 分钟。</a:t>
+            </a:r>
+          </a:p>
+        </p:txBody>
+      </p:sp>
+    </p:spTree>
+  </p:cSld>
+  <p:clrMapOvr>
+    <a:masterClrMapping/>
+  </p:clrMapOvr>
+</p:notes>
+</file>
+
+<file path=ppt/notesSlides/notesSlide9.xml><?xml version="1.0" encoding="utf-8"?>
+<p:notes xmlns:a="http://schemas.openxmlformats.org/drawingml/2006/main" xmlns:p="http://schemas.openxmlformats.org/presentationml/2006/main" xmlns:r="http://schemas.openxmlformats.org/officeDocument/2006/relationships">
+  <p:cSld>
+    <p:spTree>
+      <p:nvGrpSpPr>
+        <p:cNvPr id="1" name=""/>
+        <p:cNvGrpSpPr/>
+        <p:nvPr/>
+      </p:nvGrpSpPr>
+      <p:grpSpPr>
+        <a:xfrm>
+          <a:off x="0" y="0"/>
+          <a:ext cx="0" cy="0"/>
+          <a:chOff x="0" y="0"/>
+          <a:chExt cx="0" cy="0"/>
+        </a:xfrm>
+      </p:grpSpPr>
+      <p:sp>
+        <p:nvSpPr>
+          <p:cNvPr id="2" name="讲课提示"/>
+          <p:cNvSpPr txBox="1"/>
+          <p:nvPr/>
+        </p:nvSpPr>
+        <p:spPr>
+          <a:xfrm>
+            <a:off x="457200" y="457200"/>
+            <a:ext cx="6858000" cy="4800600"/>
+          </a:xfrm>
+          <a:prstGeom prst="rect">
+            <a:avLst/>
+          </a:prstGeom>
+        </p:spPr>
+        <p:txBody>
+          <a:bodyPr wrap="square"/>
+          <a:lstStyle/>
+          <a:p>
+            <a:r>
+              <a:rPr lang="zh-CN" dirty="0"/>
+              <a:t>第 78 节 · 核心知识点：实战、答案与自查</a:t>
+            </a:r>
+          </a:p>
+          <a:p>
+            <a:r>
+              <a:rPr lang="zh-CN" dirty="0"/>
+              <a:t/>
+            </a:r>
+          </a:p>
+          <a:p>
+            <a:r>
+              <a:rPr lang="zh-CN" dirty="0"/>
+              <a:t>讲这一页时：先让学生说出上节课的结论，再逐块讲要点。</a:t>
+            </a:r>
+          </a:p>
+          <a:p>
+            <a:r>
+              <a:rPr lang="zh-CN" dirty="0"/>
+              <a:t>每讲完一块，问一句「这一步如果写错了，报错会长什么样？」——把错误提前讲。</a:t>
+            </a:r>
+          </a:p>
+          <a:p>
+            <a:r>
+              <a:rPr lang="zh-CN" dirty="0"/>
+              <a:t/>
+            </a:r>
+          </a:p>
+          <a:p>
+            <a:r>
+              <a:rPr lang="zh-CN" dirty="0"/>
+              <a:t>本节目标：独立完成单元 14 练习，逐条自查常见错误</a:t>
+            </a:r>
+          </a:p>
+          <a:p>
+            <a:r>
+              <a:rPr lang="zh-CN" dirty="0"/>
+              <a:t/>
+            </a:r>
+          </a:p>
+          <a:p>
+            <a:r>
+              <a:rPr lang="zh-CN" dirty="0"/>
+              <a:t>看不到懂的地方，回讲义对应小节读一遍，再回来对着这页复述一次——能讲出来才算真懂。</a:t>
+            </a:r>
+          </a:p>
+        </p:txBody>
+      </p:sp>
+    </p:spTree>
+  </p:cSld>
+  <p:clrMapOvr>
+    <a:masterClrMapping/>
+  </p:clrMapOvr>
+</p:notes>
 </file>
 
 <file path=ppt/slideLayouts/slideLayout1.xml><?xml version="1.0" encoding="utf-8"?>
